--- a/宣道詩/(宣道詩165) 到遙遠地方.pptx
+++ b/宣道詩/(宣道詩165) 到遙遠地方.pptx
@@ -5,20 +5,25 @@
     <p:sldMasterId id="2147483660" r:id="rId1"/>
   </p:sldMasterIdLst>
   <p:notesMasterIdLst>
-    <p:notesMasterId r:id="rId10"/>
+    <p:notesMasterId r:id="rId15"/>
   </p:notesMasterIdLst>
   <p:handoutMasterIdLst>
-    <p:handoutMasterId r:id="rId11"/>
+    <p:handoutMasterId r:id="rId16"/>
   </p:handoutMasterIdLst>
   <p:sldIdLst>
-    <p:sldId id="1611" r:id="rId2"/>
-    <p:sldId id="1612" r:id="rId3"/>
-    <p:sldId id="1613" r:id="rId4"/>
-    <p:sldId id="1614" r:id="rId5"/>
-    <p:sldId id="1615" r:id="rId6"/>
-    <p:sldId id="1617" r:id="rId7"/>
-    <p:sldId id="1616" r:id="rId8"/>
-    <p:sldId id="1618" r:id="rId9"/>
+    <p:sldId id="755" r:id="rId2"/>
+    <p:sldId id="756" r:id="rId3"/>
+    <p:sldId id="757" r:id="rId4"/>
+    <p:sldId id="758" r:id="rId5"/>
+    <p:sldId id="759" r:id="rId6"/>
+    <p:sldId id="760" r:id="rId7"/>
+    <p:sldId id="761" r:id="rId8"/>
+    <p:sldId id="762" r:id="rId9"/>
+    <p:sldId id="763" r:id="rId10"/>
+    <p:sldId id="764" r:id="rId11"/>
+    <p:sldId id="765" r:id="rId12"/>
+    <p:sldId id="766" r:id="rId13"/>
+    <p:sldId id="767" r:id="rId14"/>
   </p:sldIdLst>
   <p:sldSz cx="12192000" cy="6858000"/>
   <p:notesSz cx="6858000" cy="9144000"/>
@@ -317,6 +322,11 @@
         </p:txBody>
       </p:sp>
     </p:spTree>
+    <p:extLst>
+      <p:ext uri="{BB962C8B-B14F-4D97-AF65-F5344CB8AC3E}">
+        <p14:creationId xmlns:p14="http://schemas.microsoft.com/office/powerpoint/2010/main" val="1"/>
+      </p:ext>
+    </p:extLst>
   </p:cSld>
   <p:clrMap bg1="lt1" tx1="dk1" bg2="lt2" tx2="dk2" accent1="accent1" accent2="accent2" accent3="accent3" accent4="accent4" accent5="accent5" accent6="accent6" hlink="hlink" folHlink="folHlink"/>
 </p:handoutMaster>
@@ -466,38 +476,37 @@
           <a:p>
             <a:pPr lvl="0"/>
             <a:r>
-              <a:rPr lang="zh-TW" altLang="en-US" smtClean="0"/>
+              <a:rPr lang="zh-TW" altLang="en-US"/>
               <a:t>按一下以編輯母片文字樣式</a:t>
             </a:r>
           </a:p>
           <a:p>
             <a:pPr lvl="1"/>
             <a:r>
-              <a:rPr lang="zh-TW" altLang="en-US" smtClean="0"/>
+              <a:rPr lang="zh-TW" altLang="en-US"/>
               <a:t>第二層</a:t>
             </a:r>
           </a:p>
           <a:p>
             <a:pPr lvl="2"/>
             <a:r>
-              <a:rPr lang="zh-TW" altLang="en-US" smtClean="0"/>
+              <a:rPr lang="zh-TW" altLang="en-US"/>
               <a:t>第三層</a:t>
             </a:r>
           </a:p>
           <a:p>
             <a:pPr lvl="3"/>
             <a:r>
-              <a:rPr lang="zh-TW" altLang="en-US" smtClean="0"/>
+              <a:rPr lang="zh-TW" altLang="en-US"/>
               <a:t>第四層</a:t>
             </a:r>
           </a:p>
           <a:p>
             <a:pPr lvl="4"/>
             <a:r>
-              <a:rPr lang="zh-TW" altLang="en-US" smtClean="0"/>
+              <a:rPr lang="zh-TW" altLang="en-US"/>
               <a:t>第五層</a:t>
             </a:r>
-            <a:endParaRPr lang="zh-TW" altLang="en-US"/>
           </a:p>
         </p:txBody>
       </p:sp>
@@ -703,7 +712,7 @@
           <a:lstStyle/>
           <a:p>
             <a:r>
-              <a:rPr lang="en-US" altLang="zh-TW" smtClean="0"/>
+              <a:rPr lang="en-US" altLang="zh-TW"/>
               <a:t>Click to edit Master title style</a:t>
             </a:r>
             <a:endParaRPr lang="zh-TW" altLang="en-US"/>
@@ -822,7 +831,7 @@
           </a:lstStyle>
           <a:p>
             <a:r>
-              <a:rPr lang="en-US" altLang="zh-TW" smtClean="0"/>
+              <a:rPr lang="en-US" altLang="zh-TW"/>
               <a:t>Click to edit Master subtitle style</a:t>
             </a:r>
             <a:endParaRPr lang="zh-TW" altLang="en-US"/>
@@ -945,7 +954,7 @@
           <a:lstStyle/>
           <a:p>
             <a:r>
-              <a:rPr lang="en-US" altLang="zh-TW" smtClean="0"/>
+              <a:rPr lang="en-US" altLang="zh-TW"/>
               <a:t>Click to edit Master title style</a:t>
             </a:r>
             <a:endParaRPr lang="zh-TW" altLang="en-US"/>
@@ -969,35 +978,35 @@
           <a:p>
             <a:pPr lvl="0"/>
             <a:r>
-              <a:rPr lang="en-US" altLang="zh-TW" smtClean="0"/>
+              <a:rPr lang="en-US" altLang="zh-TW"/>
               <a:t>Edit Master text styles</a:t>
             </a:r>
           </a:p>
           <a:p>
             <a:pPr lvl="1"/>
             <a:r>
-              <a:rPr lang="en-US" altLang="zh-TW" smtClean="0"/>
+              <a:rPr lang="en-US" altLang="zh-TW"/>
               <a:t>Second level</a:t>
             </a:r>
           </a:p>
           <a:p>
             <a:pPr lvl="2"/>
             <a:r>
-              <a:rPr lang="en-US" altLang="zh-TW" smtClean="0"/>
+              <a:rPr lang="en-US" altLang="zh-TW"/>
               <a:t>Third level</a:t>
             </a:r>
           </a:p>
           <a:p>
             <a:pPr lvl="3"/>
             <a:r>
-              <a:rPr lang="en-US" altLang="zh-TW" smtClean="0"/>
+              <a:rPr lang="en-US" altLang="zh-TW"/>
               <a:t>Fourth level</a:t>
             </a:r>
           </a:p>
           <a:p>
             <a:pPr lvl="4"/>
             <a:r>
-              <a:rPr lang="en-US" altLang="zh-TW" smtClean="0"/>
+              <a:rPr lang="en-US" altLang="zh-TW"/>
               <a:t>Fifth level</a:t>
             </a:r>
             <a:endParaRPr lang="zh-TW" altLang="en-US"/>
@@ -1125,7 +1134,7 @@
           <a:lstStyle/>
           <a:p>
             <a:r>
-              <a:rPr lang="en-US" altLang="zh-TW" smtClean="0"/>
+              <a:rPr lang="en-US" altLang="zh-TW"/>
               <a:t>Click to edit Master title style</a:t>
             </a:r>
             <a:endParaRPr lang="zh-TW" altLang="en-US"/>
@@ -1154,35 +1163,35 @@
           <a:p>
             <a:pPr lvl="0"/>
             <a:r>
-              <a:rPr lang="en-US" altLang="zh-TW" smtClean="0"/>
+              <a:rPr lang="en-US" altLang="zh-TW"/>
               <a:t>Edit Master text styles</a:t>
             </a:r>
           </a:p>
           <a:p>
             <a:pPr lvl="1"/>
             <a:r>
-              <a:rPr lang="en-US" altLang="zh-TW" smtClean="0"/>
+              <a:rPr lang="en-US" altLang="zh-TW"/>
               <a:t>Second level</a:t>
             </a:r>
           </a:p>
           <a:p>
             <a:pPr lvl="2"/>
             <a:r>
-              <a:rPr lang="en-US" altLang="zh-TW" smtClean="0"/>
+              <a:rPr lang="en-US" altLang="zh-TW"/>
               <a:t>Third level</a:t>
             </a:r>
           </a:p>
           <a:p>
             <a:pPr lvl="3"/>
             <a:r>
-              <a:rPr lang="en-US" altLang="zh-TW" smtClean="0"/>
+              <a:rPr lang="en-US" altLang="zh-TW"/>
               <a:t>Fourth level</a:t>
             </a:r>
           </a:p>
           <a:p>
             <a:pPr lvl="4"/>
             <a:r>
-              <a:rPr lang="en-US" altLang="zh-TW" smtClean="0"/>
+              <a:rPr lang="en-US" altLang="zh-TW"/>
               <a:t>Fifth level</a:t>
             </a:r>
             <a:endParaRPr lang="zh-TW" altLang="en-US"/>
@@ -1305,7 +1314,7 @@
           <a:lstStyle/>
           <a:p>
             <a:r>
-              <a:rPr lang="en-US" altLang="zh-TW" smtClean="0"/>
+              <a:rPr lang="en-US" altLang="zh-TW"/>
               <a:t>Click to edit Master title style</a:t>
             </a:r>
             <a:endParaRPr lang="zh-TW" altLang="en-US"/>
@@ -1329,35 +1338,35 @@
           <a:p>
             <a:pPr lvl="0"/>
             <a:r>
-              <a:rPr lang="en-US" altLang="zh-TW" smtClean="0"/>
+              <a:rPr lang="en-US" altLang="zh-TW"/>
               <a:t>Edit Master text styles</a:t>
             </a:r>
           </a:p>
           <a:p>
             <a:pPr lvl="1"/>
             <a:r>
-              <a:rPr lang="en-US" altLang="zh-TW" smtClean="0"/>
+              <a:rPr lang="en-US" altLang="zh-TW"/>
               <a:t>Second level</a:t>
             </a:r>
           </a:p>
           <a:p>
             <a:pPr lvl="2"/>
             <a:r>
-              <a:rPr lang="en-US" altLang="zh-TW" smtClean="0"/>
+              <a:rPr lang="en-US" altLang="zh-TW"/>
               <a:t>Third level</a:t>
             </a:r>
           </a:p>
           <a:p>
             <a:pPr lvl="3"/>
             <a:r>
-              <a:rPr lang="en-US" altLang="zh-TW" smtClean="0"/>
+              <a:rPr lang="en-US" altLang="zh-TW"/>
               <a:t>Fourth level</a:t>
             </a:r>
           </a:p>
           <a:p>
             <a:pPr lvl="4"/>
             <a:r>
-              <a:rPr lang="en-US" altLang="zh-TW" smtClean="0"/>
+              <a:rPr lang="en-US" altLang="zh-TW"/>
               <a:t>Fifth level</a:t>
             </a:r>
             <a:endParaRPr lang="zh-TW" altLang="en-US"/>
@@ -1489,7 +1498,7 @@
           </a:lstStyle>
           <a:p>
             <a:r>
-              <a:rPr lang="en-US" altLang="zh-TW" smtClean="0"/>
+              <a:rPr lang="en-US" altLang="zh-TW"/>
               <a:t>Click to edit Master title style</a:t>
             </a:r>
             <a:endParaRPr lang="zh-TW" altLang="en-US"/>
@@ -1609,7 +1618,7 @@
           <a:p>
             <a:pPr lvl="0"/>
             <a:r>
-              <a:rPr lang="en-US" altLang="zh-TW" smtClean="0"/>
+              <a:rPr lang="en-US" altLang="zh-TW"/>
               <a:t>Edit Master text styles</a:t>
             </a:r>
           </a:p>
@@ -1731,7 +1740,7 @@
           <a:lstStyle/>
           <a:p>
             <a:r>
-              <a:rPr lang="en-US" altLang="zh-TW" smtClean="0"/>
+              <a:rPr lang="en-US" altLang="zh-TW"/>
               <a:t>Click to edit Master title style</a:t>
             </a:r>
             <a:endParaRPr lang="zh-TW" altLang="en-US"/>
@@ -1788,35 +1797,35 @@
           <a:p>
             <a:pPr lvl="0"/>
             <a:r>
-              <a:rPr lang="en-US" altLang="zh-TW" smtClean="0"/>
+              <a:rPr lang="en-US" altLang="zh-TW"/>
               <a:t>Edit Master text styles</a:t>
             </a:r>
           </a:p>
           <a:p>
             <a:pPr lvl="1"/>
             <a:r>
-              <a:rPr lang="en-US" altLang="zh-TW" smtClean="0"/>
+              <a:rPr lang="en-US" altLang="zh-TW"/>
               <a:t>Second level</a:t>
             </a:r>
           </a:p>
           <a:p>
             <a:pPr lvl="2"/>
             <a:r>
-              <a:rPr lang="en-US" altLang="zh-TW" smtClean="0"/>
+              <a:rPr lang="en-US" altLang="zh-TW"/>
               <a:t>Third level</a:t>
             </a:r>
           </a:p>
           <a:p>
             <a:pPr lvl="3"/>
             <a:r>
-              <a:rPr lang="en-US" altLang="zh-TW" smtClean="0"/>
+              <a:rPr lang="en-US" altLang="zh-TW"/>
               <a:t>Fourth level</a:t>
             </a:r>
           </a:p>
           <a:p>
             <a:pPr lvl="4"/>
             <a:r>
-              <a:rPr lang="en-US" altLang="zh-TW" smtClean="0"/>
+              <a:rPr lang="en-US" altLang="zh-TW"/>
               <a:t>Fifth level</a:t>
             </a:r>
             <a:endParaRPr lang="zh-TW" altLang="en-US"/>
@@ -1873,35 +1882,35 @@
           <a:p>
             <a:pPr lvl="0"/>
             <a:r>
-              <a:rPr lang="en-US" altLang="zh-TW" smtClean="0"/>
+              <a:rPr lang="en-US" altLang="zh-TW"/>
               <a:t>Edit Master text styles</a:t>
             </a:r>
           </a:p>
           <a:p>
             <a:pPr lvl="1"/>
             <a:r>
-              <a:rPr lang="en-US" altLang="zh-TW" smtClean="0"/>
+              <a:rPr lang="en-US" altLang="zh-TW"/>
               <a:t>Second level</a:t>
             </a:r>
           </a:p>
           <a:p>
             <a:pPr lvl="2"/>
             <a:r>
-              <a:rPr lang="en-US" altLang="zh-TW" smtClean="0"/>
+              <a:rPr lang="en-US" altLang="zh-TW"/>
               <a:t>Third level</a:t>
             </a:r>
           </a:p>
           <a:p>
             <a:pPr lvl="3"/>
             <a:r>
-              <a:rPr lang="en-US" altLang="zh-TW" smtClean="0"/>
+              <a:rPr lang="en-US" altLang="zh-TW"/>
               <a:t>Fourth level</a:t>
             </a:r>
           </a:p>
           <a:p>
             <a:pPr lvl="4"/>
             <a:r>
-              <a:rPr lang="en-US" altLang="zh-TW" smtClean="0"/>
+              <a:rPr lang="en-US" altLang="zh-TW"/>
               <a:t>Fifth level</a:t>
             </a:r>
             <a:endParaRPr lang="zh-TW" altLang="en-US"/>
@@ -2028,7 +2037,7 @@
           </a:lstStyle>
           <a:p>
             <a:r>
-              <a:rPr lang="en-US" altLang="zh-TW" smtClean="0"/>
+              <a:rPr lang="en-US" altLang="zh-TW"/>
               <a:t>Click to edit Master title style</a:t>
             </a:r>
             <a:endParaRPr lang="zh-TW" altLang="en-US"/>
@@ -2094,7 +2103,7 @@
           <a:p>
             <a:pPr lvl="0"/>
             <a:r>
-              <a:rPr lang="en-US" altLang="zh-TW" smtClean="0"/>
+              <a:rPr lang="en-US" altLang="zh-TW"/>
               <a:t>Edit Master text styles</a:t>
             </a:r>
           </a:p>
@@ -2150,35 +2159,35 @@
           <a:p>
             <a:pPr lvl="0"/>
             <a:r>
-              <a:rPr lang="en-US" altLang="zh-TW" smtClean="0"/>
+              <a:rPr lang="en-US" altLang="zh-TW"/>
               <a:t>Edit Master text styles</a:t>
             </a:r>
           </a:p>
           <a:p>
             <a:pPr lvl="1"/>
             <a:r>
-              <a:rPr lang="en-US" altLang="zh-TW" smtClean="0"/>
+              <a:rPr lang="en-US" altLang="zh-TW"/>
               <a:t>Second level</a:t>
             </a:r>
           </a:p>
           <a:p>
             <a:pPr lvl="2"/>
             <a:r>
-              <a:rPr lang="en-US" altLang="zh-TW" smtClean="0"/>
+              <a:rPr lang="en-US" altLang="zh-TW"/>
               <a:t>Third level</a:t>
             </a:r>
           </a:p>
           <a:p>
             <a:pPr lvl="3"/>
             <a:r>
-              <a:rPr lang="en-US" altLang="zh-TW" smtClean="0"/>
+              <a:rPr lang="en-US" altLang="zh-TW"/>
               <a:t>Fourth level</a:t>
             </a:r>
           </a:p>
           <a:p>
             <a:pPr lvl="4"/>
             <a:r>
-              <a:rPr lang="en-US" altLang="zh-TW" smtClean="0"/>
+              <a:rPr lang="en-US" altLang="zh-TW"/>
               <a:t>Fifth level</a:t>
             </a:r>
             <a:endParaRPr lang="zh-TW" altLang="en-US"/>
@@ -2244,7 +2253,7 @@
           <a:p>
             <a:pPr lvl="0"/>
             <a:r>
-              <a:rPr lang="en-US" altLang="zh-TW" smtClean="0"/>
+              <a:rPr lang="en-US" altLang="zh-TW"/>
               <a:t>Edit Master text styles</a:t>
             </a:r>
           </a:p>
@@ -2300,35 +2309,35 @@
           <a:p>
             <a:pPr lvl="0"/>
             <a:r>
-              <a:rPr lang="en-US" altLang="zh-TW" smtClean="0"/>
+              <a:rPr lang="en-US" altLang="zh-TW"/>
               <a:t>Edit Master text styles</a:t>
             </a:r>
           </a:p>
           <a:p>
             <a:pPr lvl="1"/>
             <a:r>
-              <a:rPr lang="en-US" altLang="zh-TW" smtClean="0"/>
+              <a:rPr lang="en-US" altLang="zh-TW"/>
               <a:t>Second level</a:t>
             </a:r>
           </a:p>
           <a:p>
             <a:pPr lvl="2"/>
             <a:r>
-              <a:rPr lang="en-US" altLang="zh-TW" smtClean="0"/>
+              <a:rPr lang="en-US" altLang="zh-TW"/>
               <a:t>Third level</a:t>
             </a:r>
           </a:p>
           <a:p>
             <a:pPr lvl="3"/>
             <a:r>
-              <a:rPr lang="en-US" altLang="zh-TW" smtClean="0"/>
+              <a:rPr lang="en-US" altLang="zh-TW"/>
               <a:t>Fourth level</a:t>
             </a:r>
           </a:p>
           <a:p>
             <a:pPr lvl="4"/>
             <a:r>
-              <a:rPr lang="en-US" altLang="zh-TW" smtClean="0"/>
+              <a:rPr lang="en-US" altLang="zh-TW"/>
               <a:t>Fifth level</a:t>
             </a:r>
             <a:endParaRPr lang="zh-TW" altLang="en-US"/>
@@ -2451,7 +2460,7 @@
           <a:lstStyle/>
           <a:p>
             <a:r>
-              <a:rPr lang="en-US" altLang="zh-TW" smtClean="0"/>
+              <a:rPr lang="en-US" altLang="zh-TW"/>
               <a:t>Click to edit Master title style</a:t>
             </a:r>
             <a:endParaRPr lang="zh-TW" altLang="en-US"/>
@@ -2683,7 +2692,7 @@
           </a:lstStyle>
           <a:p>
             <a:r>
-              <a:rPr lang="en-US" altLang="zh-TW" smtClean="0"/>
+              <a:rPr lang="en-US" altLang="zh-TW"/>
               <a:t>Click to edit Master title style</a:t>
             </a:r>
             <a:endParaRPr lang="zh-TW" altLang="en-US"/>
@@ -2740,35 +2749,35 @@
           <a:p>
             <a:pPr lvl="0"/>
             <a:r>
-              <a:rPr lang="en-US" altLang="zh-TW" smtClean="0"/>
+              <a:rPr lang="en-US" altLang="zh-TW"/>
               <a:t>Edit Master text styles</a:t>
             </a:r>
           </a:p>
           <a:p>
             <a:pPr lvl="1"/>
             <a:r>
-              <a:rPr lang="en-US" altLang="zh-TW" smtClean="0"/>
+              <a:rPr lang="en-US" altLang="zh-TW"/>
               <a:t>Second level</a:t>
             </a:r>
           </a:p>
           <a:p>
             <a:pPr lvl="2"/>
             <a:r>
-              <a:rPr lang="en-US" altLang="zh-TW" smtClean="0"/>
+              <a:rPr lang="en-US" altLang="zh-TW"/>
               <a:t>Third level</a:t>
             </a:r>
           </a:p>
           <a:p>
             <a:pPr lvl="3"/>
             <a:r>
-              <a:rPr lang="en-US" altLang="zh-TW" smtClean="0"/>
+              <a:rPr lang="en-US" altLang="zh-TW"/>
               <a:t>Fourth level</a:t>
             </a:r>
           </a:p>
           <a:p>
             <a:pPr lvl="4"/>
             <a:r>
-              <a:rPr lang="en-US" altLang="zh-TW" smtClean="0"/>
+              <a:rPr lang="en-US" altLang="zh-TW"/>
               <a:t>Fifth level</a:t>
             </a:r>
             <a:endParaRPr lang="zh-TW" altLang="en-US"/>
@@ -2834,7 +2843,7 @@
           <a:p>
             <a:pPr lvl="0"/>
             <a:r>
-              <a:rPr lang="en-US" altLang="zh-TW" smtClean="0"/>
+              <a:rPr lang="en-US" altLang="zh-TW"/>
               <a:t>Edit Master text styles</a:t>
             </a:r>
           </a:p>
@@ -2965,7 +2974,7 @@
           </a:lstStyle>
           <a:p>
             <a:r>
-              <a:rPr lang="en-US" altLang="zh-TW" smtClean="0"/>
+              <a:rPr lang="en-US" altLang="zh-TW"/>
               <a:t>Click to edit Master title style</a:t>
             </a:r>
             <a:endParaRPr lang="zh-TW" altLang="en-US"/>
@@ -3030,7 +3039,7 @@
           </a:lstStyle>
           <a:p>
             <a:r>
-              <a:rPr lang="en-US" altLang="zh-TW" smtClean="0"/>
+              <a:rPr lang="en-US" altLang="zh-TW"/>
               <a:t>Click icon to add picture</a:t>
             </a:r>
             <a:endParaRPr lang="zh-TW" altLang="en-US"/>
@@ -3096,7 +3105,7 @@
           <a:p>
             <a:pPr lvl="0"/>
             <a:r>
-              <a:rPr lang="en-US" altLang="zh-TW" smtClean="0"/>
+              <a:rPr lang="en-US" altLang="zh-TW"/>
               <a:t>Edit Master text styles</a:t>
             </a:r>
           </a:p>
@@ -3238,10 +3247,9 @@
           <a:lstStyle/>
           <a:p>
             <a:r>
-              <a:rPr lang="zh-TW" altLang="en-US" smtClean="0"/>
+              <a:rPr lang="zh-TW" altLang="en-US"/>
               <a:t>按一下以編輯母片標題樣式</a:t>
             </a:r>
-            <a:endParaRPr lang="zh-TW" altLang="en-US"/>
           </a:p>
         </p:txBody>
       </p:sp>
@@ -3272,38 +3280,37 @@
           <a:p>
             <a:pPr lvl="0"/>
             <a:r>
-              <a:rPr lang="zh-TW" altLang="en-US" smtClean="0"/>
+              <a:rPr lang="zh-TW" altLang="en-US"/>
               <a:t>按一下以編輯母片文字樣式</a:t>
             </a:r>
           </a:p>
           <a:p>
             <a:pPr lvl="1"/>
             <a:r>
-              <a:rPr lang="zh-TW" altLang="en-US" smtClean="0"/>
+              <a:rPr lang="zh-TW" altLang="en-US"/>
               <a:t>第二層</a:t>
             </a:r>
           </a:p>
           <a:p>
             <a:pPr lvl="2"/>
             <a:r>
-              <a:rPr lang="zh-TW" altLang="en-US" smtClean="0"/>
+              <a:rPr lang="zh-TW" altLang="en-US"/>
               <a:t>第三層</a:t>
             </a:r>
           </a:p>
           <a:p>
             <a:pPr lvl="3"/>
             <a:r>
-              <a:rPr lang="zh-TW" altLang="en-US" smtClean="0"/>
+              <a:rPr lang="zh-TW" altLang="en-US"/>
               <a:t>第四層</a:t>
             </a:r>
           </a:p>
           <a:p>
             <a:pPr lvl="4"/>
             <a:r>
-              <a:rPr lang="zh-TW" altLang="en-US" smtClean="0"/>
+              <a:rPr lang="zh-TW" altLang="en-US"/>
               <a:t>第五層</a:t>
             </a:r>
-            <a:endParaRPr lang="zh-TW" altLang="en-US"/>
           </a:p>
         </p:txBody>
       </p:sp>
@@ -3724,7 +3731,7 @@
       </p:grpSpPr>
       <p:sp>
         <p:nvSpPr>
-          <p:cNvPr id="4" name="Title 3"/>
+          <p:cNvPr id="4" name="標題 3"/>
           <p:cNvSpPr>
             <a:spLocks noGrp="1"/>
           </p:cNvSpPr>
@@ -3732,49 +3739,228 @@
             <p:ph type="title"/>
           </p:nvPr>
         </p:nvSpPr>
-        <p:spPr/>
+        <p:spPr>
+          <a:xfrm>
+            <a:off x="0" y="2660915"/>
+            <a:ext cx="12192000" cy="1143000"/>
+          </a:xfrm>
+        </p:spPr>
         <p:txBody>
           <a:bodyPr>
+            <a:noAutofit/>
+          </a:bodyPr>
+          <a:lstStyle/>
+          <a:p>
+            <a:r>
+              <a:rPr lang="zh-CN" altLang="en-US" sz="5333" b="1" u="sng" dirty="0">
+                <a:solidFill>
+                  <a:srgbClr val="000066"/>
+                </a:solidFill>
+                <a:effectLst>
+                  <a:outerShdw blurRad="38100" dist="38100" dir="2700000" algn="tl">
+                    <a:srgbClr val="000000">
+                      <a:alpha val="43137"/>
+                    </a:srgbClr>
+                  </a:outerShdw>
+                </a:effectLst>
+                <a:latin typeface="微軟正黑體" pitchFamily="34" charset="-120"/>
+                <a:ea typeface="微軟正黑體" pitchFamily="34" charset="-120"/>
+              </a:rPr>
+              <a:t>宣道詩 </a:t>
+            </a:r>
+            <a:r>
+              <a:rPr lang="en-US" altLang="zh-CN" sz="5333" b="1" u="sng" dirty="0">
+                <a:solidFill>
+                  <a:srgbClr val="000066"/>
+                </a:solidFill>
+                <a:effectLst>
+                  <a:outerShdw blurRad="38100" dist="38100" dir="2700000" algn="tl">
+                    <a:srgbClr val="000000">
+                      <a:alpha val="43137"/>
+                    </a:srgbClr>
+                  </a:outerShdw>
+                </a:effectLst>
+                <a:latin typeface="微軟正黑體" pitchFamily="34" charset="-120"/>
+                <a:ea typeface="微軟正黑體" pitchFamily="34" charset="-120"/>
+              </a:rPr>
+              <a:t>165</a:t>
+            </a:r>
+            <a:br>
+              <a:rPr lang="en-US" altLang="zh-CN" sz="7200" b="1" i="1" dirty="0">
+                <a:solidFill>
+                  <a:srgbClr val="660033"/>
+                </a:solidFill>
+                <a:effectLst>
+                  <a:outerShdw blurRad="38100" dist="38100" dir="2700000" algn="tl">
+                    <a:srgbClr val="000000">
+                      <a:alpha val="43137"/>
+                    </a:srgbClr>
+                  </a:outerShdw>
+                </a:effectLst>
+                <a:latin typeface="微軟正黑體" pitchFamily="34" charset="-120"/>
+                <a:ea typeface="微軟正黑體" pitchFamily="34" charset="-120"/>
+              </a:rPr>
+            </a:br>
+            <a:r>
+              <a:rPr lang="zh-TW" altLang="en-US" sz="8000" b="1" dirty="0">
+                <a:solidFill>
+                  <a:srgbClr val="660033"/>
+                </a:solidFill>
+                <a:effectLst>
+                  <a:outerShdw blurRad="38100" dist="38100" dir="2700000" algn="tl">
+                    <a:srgbClr val="000000">
+                      <a:alpha val="43137"/>
+                    </a:srgbClr>
+                  </a:outerShdw>
+                </a:effectLst>
+                <a:latin typeface="微軟正黑體" pitchFamily="34" charset="-120"/>
+                <a:ea typeface="微軟正黑體" pitchFamily="34" charset="-120"/>
+              </a:rPr>
+              <a:t>到遙遠地方</a:t>
+            </a:r>
+          </a:p>
+        </p:txBody>
+      </p:sp>
+    </p:spTree>
+    <p:extLst>
+      <p:ext uri="{BB962C8B-B14F-4D97-AF65-F5344CB8AC3E}">
+        <p14:creationId xmlns:p14="http://schemas.microsoft.com/office/powerpoint/2010/main" val="3724263107"/>
+      </p:ext>
+    </p:extLst>
+  </p:cSld>
+  <p:clrMapOvr>
+    <a:masterClrMapping/>
+  </p:clrMapOvr>
+</p:sld>
+</file>
+
+<file path=ppt/slides/slide10.xml><?xml version="1.0" encoding="utf-8"?>
+<p:sld xmlns:a="http://schemas.openxmlformats.org/drawingml/2006/main" xmlns:r="http://schemas.openxmlformats.org/officeDocument/2006/relationships" xmlns:p="http://schemas.openxmlformats.org/presentationml/2006/main">
+  <p:cSld>
+    <p:spTree>
+      <p:nvGrpSpPr>
+        <p:cNvPr id="1" name="">
+          <a:extLst>
+            <a:ext uri="{FF2B5EF4-FFF2-40B4-BE49-F238E27FC236}">
+              <a16:creationId xmlns:a16="http://schemas.microsoft.com/office/drawing/2014/main" id="{D9675E1E-AFDA-93D3-6BA3-0F9E63EC9282}"/>
+            </a:ext>
+          </a:extLst>
+        </p:cNvPr>
+        <p:cNvGrpSpPr/>
+        <p:nvPr/>
+      </p:nvGrpSpPr>
+      <p:grpSpPr>
+        <a:xfrm>
+          <a:off x="0" y="0"/>
+          <a:ext cx="0" cy="0"/>
+          <a:chOff x="0" y="0"/>
+          <a:chExt cx="0" cy="0"/>
+        </a:xfrm>
+      </p:grpSpPr>
+      <p:sp>
+        <p:nvSpPr>
+          <p:cNvPr id="5" name="內容版面配置區 4">
+            <a:extLst>
+              <a:ext uri="{FF2B5EF4-FFF2-40B4-BE49-F238E27FC236}">
+                <a16:creationId xmlns:a16="http://schemas.microsoft.com/office/drawing/2014/main" id="{99D62C2D-37A8-C3C1-FE1C-C34A4CC74E36}"/>
+              </a:ext>
+            </a:extLst>
+          </p:cNvPr>
+          <p:cNvSpPr>
+            <a:spLocks noGrp="1"/>
+          </p:cNvSpPr>
+          <p:nvPr>
+            <p:ph idx="1"/>
+          </p:nvPr>
+        </p:nvSpPr>
+        <p:spPr>
+          <a:xfrm>
+            <a:off x="0" y="2084853"/>
+            <a:ext cx="12192000" cy="2404863"/>
+          </a:xfrm>
+        </p:spPr>
+        <p:txBody>
+          <a:bodyPr anchor="ctr">
             <a:normAutofit/>
           </a:bodyPr>
           <a:lstStyle/>
           <a:p>
-            <a:r>
-              <a:rPr lang="en-US" altLang="zh-CN" sz="4800" b="1" dirty="0">
+            <a:pPr marL="0" indent="0" algn="ctr">
+              <a:buNone/>
+            </a:pPr>
+            <a:r>
+              <a:rPr lang="zh-TW" altLang="en-US" sz="6400" b="1" dirty="0">
                 <a:solidFill>
-                  <a:srgbClr val="002060"/>
+                  <a:srgbClr val="660033"/>
                 </a:solidFill>
-                <a:latin typeface="Microsoft JhengHei" panose="020B0604030504040204" pitchFamily="34" charset="-120"/>
-                <a:ea typeface="Microsoft JhengHei" panose="020B0604030504040204" pitchFamily="34" charset="-120"/>
+                <a:latin typeface="Microsoft JhengHei" pitchFamily="34" charset="-120"/>
+                <a:ea typeface="Microsoft JhengHei" pitchFamily="34" charset="-120"/>
               </a:rPr>
-              <a:t>【</a:t>
-            </a:r>
-            <a:r>
-              <a:rPr lang="zh-CN" altLang="en-US" sz="4800" b="1" dirty="0">
+              <a:t>到遠方  傳福音  我必去  我必去</a:t>
+            </a:r>
+          </a:p>
+          <a:p>
+            <a:pPr marL="0" indent="0" algn="ctr">
+              <a:buNone/>
+            </a:pPr>
+            <a:r>
+              <a:rPr lang="zh-TW" altLang="en-US" sz="6400" b="1" dirty="0">
                 <a:solidFill>
-                  <a:srgbClr val="002060"/>
+                  <a:srgbClr val="660033"/>
                 </a:solidFill>
-                <a:latin typeface="Microsoft JhengHei" panose="020B0604030504040204" pitchFamily="34" charset="-120"/>
-                <a:ea typeface="Microsoft JhengHei" panose="020B0604030504040204" pitchFamily="34" charset="-120"/>
+                <a:latin typeface="Microsoft JhengHei" pitchFamily="34" charset="-120"/>
+                <a:ea typeface="Microsoft JhengHei" pitchFamily="34" charset="-120"/>
               </a:rPr>
-              <a:t>到遙遠地方</a:t>
-            </a:r>
-            <a:r>
-              <a:rPr lang="en-US" altLang="zh-CN" sz="4800" b="1" dirty="0">
-                <a:solidFill>
-                  <a:srgbClr val="002060"/>
-                </a:solidFill>
-                <a:latin typeface="Microsoft JhengHei" panose="020B0604030504040204" pitchFamily="34" charset="-120"/>
-                <a:ea typeface="Microsoft JhengHei" panose="020B0604030504040204" pitchFamily="34" charset="-120"/>
-              </a:rPr>
-              <a:t>】</a:t>
-            </a:r>
-          </a:p>
-        </p:txBody>
-      </p:sp>
-      <p:sp>
-        <p:nvSpPr>
-          <p:cNvPr id="5" name="Content Placeholder 4"/>
+              <a:t>至世界  全世界  普及救恩真理</a:t>
+            </a:r>
+          </a:p>
+        </p:txBody>
+      </p:sp>
+    </p:spTree>
+    <p:extLst>
+      <p:ext uri="{BB962C8B-B14F-4D97-AF65-F5344CB8AC3E}">
+        <p14:creationId xmlns:p14="http://schemas.microsoft.com/office/powerpoint/2010/main" val="1545514942"/>
+      </p:ext>
+    </p:extLst>
+  </p:cSld>
+  <p:clrMapOvr>
+    <a:masterClrMapping/>
+  </p:clrMapOvr>
+</p:sld>
+</file>
+
+<file path=ppt/slides/slide11.xml><?xml version="1.0" encoding="utf-8"?>
+<p:sld xmlns:a="http://schemas.openxmlformats.org/drawingml/2006/main" xmlns:r="http://schemas.openxmlformats.org/officeDocument/2006/relationships" xmlns:p="http://schemas.openxmlformats.org/presentationml/2006/main">
+  <p:cSld>
+    <p:spTree>
+      <p:nvGrpSpPr>
+        <p:cNvPr id="1" name="">
+          <a:extLst>
+            <a:ext uri="{FF2B5EF4-FFF2-40B4-BE49-F238E27FC236}">
+              <a16:creationId xmlns:a16="http://schemas.microsoft.com/office/drawing/2014/main" id="{A9409564-2489-2B58-47C2-CC2925794110}"/>
+            </a:ext>
+          </a:extLst>
+        </p:cNvPr>
+        <p:cNvGrpSpPr/>
+        <p:nvPr/>
+      </p:nvGrpSpPr>
+      <p:grpSpPr>
+        <a:xfrm>
+          <a:off x="0" y="0"/>
+          <a:ext cx="0" cy="0"/>
+          <a:chOff x="0" y="0"/>
+          <a:chExt cx="0" cy="0"/>
+        </a:xfrm>
+      </p:grpSpPr>
+      <p:sp>
+        <p:nvSpPr>
+          <p:cNvPr id="5" name="內容版面配置區 4">
+            <a:extLst>
+              <a:ext uri="{FF2B5EF4-FFF2-40B4-BE49-F238E27FC236}">
+                <a16:creationId xmlns:a16="http://schemas.microsoft.com/office/drawing/2014/main" id="{8A5374EB-CF94-878A-0FD3-7BD4DCFB15CA}"/>
+              </a:ext>
+            </a:extLst>
+          </p:cNvPr>
           <p:cNvSpPr>
             <a:spLocks noGrp="1"/>
           </p:cNvSpPr>
@@ -3782,9 +3968,14 @@
             <p:ph idx="1"/>
           </p:nvPr>
         </p:nvSpPr>
-        <p:spPr/>
-        <p:txBody>
-          <a:bodyPr>
+        <p:spPr>
+          <a:xfrm>
+            <a:off x="0" y="2084853"/>
+            <a:ext cx="12192000" cy="2404863"/>
+          </a:xfrm>
+        </p:spPr>
+        <p:txBody>
+          <a:bodyPr anchor="ctr">
             <a:normAutofit/>
           </a:bodyPr>
           <a:lstStyle/>
@@ -3793,199 +3984,317 @@
               <a:buNone/>
             </a:pPr>
             <a:r>
-              <a:rPr lang="zh-TW" altLang="en-US" sz="5400" b="1" dirty="0">
+              <a:rPr lang="zh-TW" altLang="en-US" sz="6400" b="1" dirty="0">
                 <a:solidFill>
-                  <a:srgbClr val="002060"/>
+                  <a:srgbClr val="660033"/>
                 </a:solidFill>
-                <a:latin typeface="Microsoft JhengHei" panose="020B0604030504040204" pitchFamily="34" charset="-120"/>
-                <a:ea typeface="Microsoft JhengHei" panose="020B0604030504040204" pitchFamily="34" charset="-120"/>
+                <a:latin typeface="Microsoft JhengHei" pitchFamily="34" charset="-120"/>
+                <a:ea typeface="Microsoft JhengHei" pitchFamily="34" charset="-120"/>
               </a:rPr>
-              <a:t>到遙遠之地</a:t>
-            </a:r>
-            <a:r>
-              <a:rPr lang="zh-TW" altLang="en-US" sz="5400" b="1" dirty="0">
+              <a:t>亡羊流離失所  牧人慈心垂憐</a:t>
+            </a:r>
+          </a:p>
+          <a:p>
+            <a:pPr marL="0" indent="0" algn="ctr">
+              <a:buNone/>
+            </a:pPr>
+            <a:r>
+              <a:rPr lang="zh-TW" altLang="en-US" sz="6400" b="1" dirty="0">
                 <a:solidFill>
-                  <a:srgbClr val="002060"/>
+                  <a:srgbClr val="660033"/>
                 </a:solidFill>
-                <a:latin typeface="Microsoft JhengHei" panose="020B0604030504040204" pitchFamily="34" charset="-120"/>
-                <a:ea typeface="Microsoft JhengHei" panose="020B0604030504040204" pitchFamily="34" charset="-120"/>
+                <a:latin typeface="Microsoft JhengHei" pitchFamily="34" charset="-120"/>
+                <a:ea typeface="Microsoft JhengHei" pitchFamily="34" charset="-120"/>
               </a:rPr>
-              <a:t>方  我</a:t>
-            </a:r>
-            <a:r>
-              <a:rPr lang="zh-TW" altLang="en-US" sz="5400" b="1" dirty="0">
-                <a:solidFill>
-                  <a:srgbClr val="002060"/>
-                </a:solidFill>
-                <a:latin typeface="Microsoft JhengHei" panose="020B0604030504040204" pitchFamily="34" charset="-120"/>
-                <a:ea typeface="Microsoft JhengHei" panose="020B0604030504040204" pitchFamily="34" charset="-120"/>
-              </a:rPr>
-              <a:t>必</a:t>
-            </a:r>
-            <a:r>
-              <a:rPr lang="zh-TW" altLang="en-US" sz="5400" b="1" dirty="0">
-                <a:solidFill>
-                  <a:srgbClr val="002060"/>
-                </a:solidFill>
-                <a:latin typeface="Microsoft JhengHei" panose="020B0604030504040204" pitchFamily="34" charset="-120"/>
-                <a:ea typeface="Microsoft JhengHei" panose="020B0604030504040204" pitchFamily="34" charset="-120"/>
-              </a:rPr>
-              <a:t>去  我</a:t>
-            </a:r>
-            <a:r>
-              <a:rPr lang="zh-TW" altLang="en-US" sz="5400" b="1" dirty="0">
-                <a:solidFill>
-                  <a:srgbClr val="002060"/>
-                </a:solidFill>
-                <a:latin typeface="Microsoft JhengHei" panose="020B0604030504040204" pitchFamily="34" charset="-120"/>
-                <a:ea typeface="Microsoft JhengHei" panose="020B0604030504040204" pitchFamily="34" charset="-120"/>
-              </a:rPr>
-              <a:t>必去</a:t>
-            </a:r>
-          </a:p>
-          <a:p>
-            <a:pPr marL="0" indent="0" algn="ctr">
-              <a:buNone/>
-            </a:pPr>
-            <a:r>
-              <a:rPr lang="zh-TW" altLang="en-US" sz="5400" b="1" dirty="0">
-                <a:solidFill>
-                  <a:srgbClr val="002060"/>
-                </a:solidFill>
-                <a:latin typeface="Microsoft JhengHei" panose="020B0604030504040204" pitchFamily="34" charset="-120"/>
-                <a:ea typeface="Microsoft JhengHei" panose="020B0604030504040204" pitchFamily="34" charset="-120"/>
-              </a:rPr>
-              <a:t>那處從未聞福音道</a:t>
-            </a:r>
-            <a:r>
-              <a:rPr lang="zh-TW" altLang="en-US" sz="5400" b="1" dirty="0">
-                <a:solidFill>
-                  <a:srgbClr val="002060"/>
-                </a:solidFill>
-                <a:latin typeface="Microsoft JhengHei" panose="020B0604030504040204" pitchFamily="34" charset="-120"/>
-                <a:ea typeface="Microsoft JhengHei" panose="020B0604030504040204" pitchFamily="34" charset="-120"/>
-              </a:rPr>
-              <a:t>理</a:t>
-            </a:r>
-            <a:endParaRPr lang="en-US" altLang="zh-TW" sz="5400" b="1" dirty="0">
-              <a:solidFill>
-                <a:srgbClr val="002060"/>
-              </a:solidFill>
-              <a:latin typeface="Microsoft JhengHei" panose="020B0604030504040204" pitchFamily="34" charset="-120"/>
-              <a:ea typeface="Microsoft JhengHei" panose="020B0604030504040204" pitchFamily="34" charset="-120"/>
-            </a:endParaRPr>
-          </a:p>
-          <a:p>
-            <a:pPr marL="0" indent="0" algn="ctr">
-              <a:buNone/>
-            </a:pPr>
-            <a:r>
-              <a:rPr lang="zh-TW" altLang="en-US" sz="5400" b="1" dirty="0">
-                <a:solidFill>
-                  <a:srgbClr val="002060"/>
-                </a:solidFill>
-                <a:latin typeface="Microsoft JhengHei" panose="020B0604030504040204" pitchFamily="34" charset="-120"/>
-                <a:ea typeface="Microsoft JhengHei" panose="020B0604030504040204" pitchFamily="34" charset="-120"/>
-              </a:rPr>
-              <a:t>千萬人還不</a:t>
-            </a:r>
-            <a:r>
-              <a:rPr lang="zh-TW" altLang="en-US" sz="5400" b="1" dirty="0" smtClean="0">
-                <a:solidFill>
-                  <a:srgbClr val="002060"/>
-                </a:solidFill>
-                <a:latin typeface="Microsoft JhengHei" panose="020B0604030504040204" pitchFamily="34" charset="-120"/>
-                <a:ea typeface="Microsoft JhengHei" panose="020B0604030504040204" pitchFamily="34" charset="-120"/>
-              </a:rPr>
-              <a:t>知主</a:t>
-            </a:r>
-            <a:r>
-              <a:rPr lang="zh-TW" altLang="en-US" sz="5400" b="1" dirty="0">
-                <a:solidFill>
-                  <a:srgbClr val="002060"/>
-                </a:solidFill>
-                <a:latin typeface="Microsoft JhengHei" panose="020B0604030504040204" pitchFamily="34" charset="-120"/>
-                <a:ea typeface="Microsoft JhengHei" panose="020B0604030504040204" pitchFamily="34" charset="-120"/>
-              </a:rPr>
-              <a:t>仁愛與慈悲</a:t>
-            </a:r>
-          </a:p>
-          <a:p>
-            <a:pPr marL="0" indent="0" algn="ctr">
-              <a:buNone/>
-            </a:pPr>
-            <a:r>
-              <a:rPr lang="zh-TW" altLang="en-US" sz="5400" b="1" dirty="0">
-                <a:solidFill>
-                  <a:srgbClr val="002060"/>
-                </a:solidFill>
-                <a:latin typeface="Microsoft JhengHei" panose="020B0604030504040204" pitchFamily="34" charset="-120"/>
-                <a:ea typeface="Microsoft JhengHei" panose="020B0604030504040204" pitchFamily="34" charset="-120"/>
-              </a:rPr>
-              <a:t>急傳此嘉音勿再猶</a:t>
-            </a:r>
-            <a:r>
-              <a:rPr lang="zh-TW" altLang="en-US" sz="5400" b="1" dirty="0">
-                <a:solidFill>
-                  <a:srgbClr val="002060"/>
-                </a:solidFill>
-                <a:latin typeface="Microsoft JhengHei" panose="020B0604030504040204" pitchFamily="34" charset="-120"/>
-                <a:ea typeface="Microsoft JhengHei" panose="020B0604030504040204" pitchFamily="34" charset="-120"/>
-              </a:rPr>
-              <a:t>疑</a:t>
-            </a:r>
-            <a:endParaRPr lang="zh-TW" altLang="en-US" sz="5400" b="1" dirty="0">
-              <a:solidFill>
-                <a:srgbClr val="002060"/>
-              </a:solidFill>
-              <a:latin typeface="Microsoft JhengHei" panose="020B0604030504040204" pitchFamily="34" charset="-120"/>
-              <a:ea typeface="Microsoft JhengHei" panose="020B0604030504040204" pitchFamily="34" charset="-120"/>
-            </a:endParaRPr>
-          </a:p>
-        </p:txBody>
-      </p:sp>
-      <p:sp>
-        <p:nvSpPr>
-          <p:cNvPr id="6" name="Text Box 1"/>
+              <a:t>此嘉音應傳諸彼耳邊</a:t>
+            </a:r>
+          </a:p>
+        </p:txBody>
+      </p:sp>
+      <p:sp>
+        <p:nvSpPr>
+          <p:cNvPr id="3" name="TextBox 2">
+            <a:extLst>
+              <a:ext uri="{FF2B5EF4-FFF2-40B4-BE49-F238E27FC236}">
+                <a16:creationId xmlns:a16="http://schemas.microsoft.com/office/drawing/2014/main" id="{E1A8CC41-2662-65D3-1478-767B1F4F0E53}"/>
+              </a:ext>
+            </a:extLst>
+          </p:cNvPr>
           <p:cNvSpPr txBox="1"/>
           <p:nvPr/>
         </p:nvSpPr>
         <p:spPr>
           <a:xfrm>
-            <a:off x="153888" y="1700808"/>
-            <a:ext cx="911424" cy="923330"/>
+            <a:off x="0" y="5061183"/>
+            <a:ext cx="12192000" cy="584775"/>
           </a:xfrm>
           <a:prstGeom prst="rect">
             <a:avLst/>
           </a:prstGeom>
           <a:noFill/>
-          <a:ln w="9525">
-            <a:noFill/>
-            <a:miter lim="800000"/>
-          </a:ln>
         </p:spPr>
         <p:txBody>
-          <a:bodyPr wrap="square">
+          <a:bodyPr wrap="square" rtlCol="0">
             <a:spAutoFit/>
           </a:bodyPr>
           <a:lstStyle/>
           <a:p>
             <a:pPr algn="ctr"/>
             <a:r>
-              <a:rPr lang="en-US" sz="5400" b="1" dirty="0">
+              <a:rPr lang="en-US" sz="3200" b="1" dirty="0">
                 <a:solidFill>
-                  <a:srgbClr val="002060"/>
+                  <a:srgbClr val="660033"/>
                 </a:solidFill>
               </a:rPr>
-              <a:t>1.</a:t>
-            </a:r>
+              <a:t>( 4 / 4 )</a:t>
+            </a:r>
+            <a:endParaRPr lang="vi-VN" sz="3200" b="1" dirty="0">
+              <a:solidFill>
+                <a:srgbClr val="660033"/>
+              </a:solidFill>
+            </a:endParaRPr>
           </a:p>
         </p:txBody>
       </p:sp>
     </p:spTree>
     <p:extLst>
       <p:ext uri="{BB962C8B-B14F-4D97-AF65-F5344CB8AC3E}">
-        <p14:creationId xmlns:p14="http://schemas.microsoft.com/office/powerpoint/2010/main" val="1071878597"/>
+        <p14:creationId xmlns:p14="http://schemas.microsoft.com/office/powerpoint/2010/main" val="3109159099"/>
+      </p:ext>
+    </p:extLst>
+  </p:cSld>
+  <p:clrMapOvr>
+    <a:masterClrMapping/>
+  </p:clrMapOvr>
+</p:sld>
+</file>
+
+<file path=ppt/slides/slide12.xml><?xml version="1.0" encoding="utf-8"?>
+<p:sld xmlns:a="http://schemas.openxmlformats.org/drawingml/2006/main" xmlns:r="http://schemas.openxmlformats.org/officeDocument/2006/relationships" xmlns:p="http://schemas.openxmlformats.org/presentationml/2006/main">
+  <p:cSld>
+    <p:spTree>
+      <p:nvGrpSpPr>
+        <p:cNvPr id="1" name="">
+          <a:extLst>
+            <a:ext uri="{FF2B5EF4-FFF2-40B4-BE49-F238E27FC236}">
+              <a16:creationId xmlns:a16="http://schemas.microsoft.com/office/drawing/2014/main" id="{B368E9E5-AE69-8936-6C9B-017F70199D60}"/>
+            </a:ext>
+          </a:extLst>
+        </p:cNvPr>
+        <p:cNvGrpSpPr/>
+        <p:nvPr/>
+      </p:nvGrpSpPr>
+      <p:grpSpPr>
+        <a:xfrm>
+          <a:off x="0" y="0"/>
+          <a:ext cx="0" cy="0"/>
+          <a:chOff x="0" y="0"/>
+          <a:chExt cx="0" cy="0"/>
+        </a:xfrm>
+      </p:grpSpPr>
+      <p:sp>
+        <p:nvSpPr>
+          <p:cNvPr id="5" name="內容版面配置區 4">
+            <a:extLst>
+              <a:ext uri="{FF2B5EF4-FFF2-40B4-BE49-F238E27FC236}">
+                <a16:creationId xmlns:a16="http://schemas.microsoft.com/office/drawing/2014/main" id="{106BEA7A-6C78-7D8F-C165-298EDBC21455}"/>
+              </a:ext>
+            </a:extLst>
+          </p:cNvPr>
+          <p:cNvSpPr>
+            <a:spLocks noGrp="1"/>
+          </p:cNvSpPr>
+          <p:nvPr>
+            <p:ph idx="1"/>
+          </p:nvPr>
+        </p:nvSpPr>
+        <p:spPr>
+          <a:xfrm>
+            <a:off x="0" y="2084853"/>
+            <a:ext cx="12192000" cy="2404863"/>
+          </a:xfrm>
+        </p:spPr>
+        <p:txBody>
+          <a:bodyPr anchor="ctr">
+            <a:normAutofit/>
+          </a:bodyPr>
+          <a:lstStyle/>
+          <a:p>
+            <a:pPr marL="0" indent="0" algn="ctr">
+              <a:buNone/>
+            </a:pPr>
+            <a:r>
+              <a:rPr lang="zh-TW" altLang="en-US" sz="6400" b="1" dirty="0">
+                <a:solidFill>
+                  <a:srgbClr val="660033"/>
+                </a:solidFill>
+                <a:latin typeface="Microsoft JhengHei" pitchFamily="34" charset="-120"/>
+                <a:ea typeface="Microsoft JhengHei" pitchFamily="34" charset="-120"/>
+              </a:rPr>
+              <a:t>主特遣我前往將他們齊結聯</a:t>
+            </a:r>
+          </a:p>
+          <a:p>
+            <a:pPr marL="0" indent="0" algn="ctr">
+              <a:buNone/>
+            </a:pPr>
+            <a:r>
+              <a:rPr lang="zh-TW" altLang="en-US" sz="6400" b="1" dirty="0">
+                <a:solidFill>
+                  <a:srgbClr val="660033"/>
+                </a:solidFill>
+                <a:latin typeface="Microsoft JhengHei" pitchFamily="34" charset="-120"/>
+                <a:ea typeface="Microsoft JhengHei" pitchFamily="34" charset="-120"/>
+              </a:rPr>
+              <a:t>歡迎他們歸回主羊圈</a:t>
+            </a:r>
+          </a:p>
+        </p:txBody>
+      </p:sp>
+      <p:sp>
+        <p:nvSpPr>
+          <p:cNvPr id="3" name="TextBox 2">
+            <a:extLst>
+              <a:ext uri="{FF2B5EF4-FFF2-40B4-BE49-F238E27FC236}">
+                <a16:creationId xmlns:a16="http://schemas.microsoft.com/office/drawing/2014/main" id="{E4223657-FC17-F7D7-D331-8CB83E4F24D5}"/>
+              </a:ext>
+            </a:extLst>
+          </p:cNvPr>
+          <p:cNvSpPr txBox="1"/>
+          <p:nvPr/>
+        </p:nvSpPr>
+        <p:spPr>
+          <a:xfrm>
+            <a:off x="0" y="5061183"/>
+            <a:ext cx="12192000" cy="584775"/>
+          </a:xfrm>
+          <a:prstGeom prst="rect">
+            <a:avLst/>
+          </a:prstGeom>
+          <a:noFill/>
+        </p:spPr>
+        <p:txBody>
+          <a:bodyPr wrap="square" rtlCol="0">
+            <a:spAutoFit/>
+          </a:bodyPr>
+          <a:lstStyle/>
+          <a:p>
+            <a:pPr algn="ctr"/>
+            <a:r>
+              <a:rPr lang="en-US" sz="3200" b="1" dirty="0">
+                <a:solidFill>
+                  <a:srgbClr val="660033"/>
+                </a:solidFill>
+              </a:rPr>
+              <a:t>( 4 / 4 )</a:t>
+            </a:r>
+            <a:endParaRPr lang="vi-VN" sz="3200" b="1" dirty="0">
+              <a:solidFill>
+                <a:srgbClr val="660033"/>
+              </a:solidFill>
+            </a:endParaRPr>
+          </a:p>
+        </p:txBody>
+      </p:sp>
+    </p:spTree>
+    <p:extLst>
+      <p:ext uri="{BB962C8B-B14F-4D97-AF65-F5344CB8AC3E}">
+        <p14:creationId xmlns:p14="http://schemas.microsoft.com/office/powerpoint/2010/main" val="3724901345"/>
+      </p:ext>
+    </p:extLst>
+  </p:cSld>
+  <p:clrMapOvr>
+    <a:masterClrMapping/>
+  </p:clrMapOvr>
+</p:sld>
+</file>
+
+<file path=ppt/slides/slide13.xml><?xml version="1.0" encoding="utf-8"?>
+<p:sld xmlns:a="http://schemas.openxmlformats.org/drawingml/2006/main" xmlns:r="http://schemas.openxmlformats.org/officeDocument/2006/relationships" xmlns:p="http://schemas.openxmlformats.org/presentationml/2006/main">
+  <p:cSld>
+    <p:spTree>
+      <p:nvGrpSpPr>
+        <p:cNvPr id="1" name="">
+          <a:extLst>
+            <a:ext uri="{FF2B5EF4-FFF2-40B4-BE49-F238E27FC236}">
+              <a16:creationId xmlns:a16="http://schemas.microsoft.com/office/drawing/2014/main" id="{F17245AE-24CA-9AC9-EDDE-BFB363D443EC}"/>
+            </a:ext>
+          </a:extLst>
+        </p:cNvPr>
+        <p:cNvGrpSpPr/>
+        <p:nvPr/>
+      </p:nvGrpSpPr>
+      <p:grpSpPr>
+        <a:xfrm>
+          <a:off x="0" y="0"/>
+          <a:ext cx="0" cy="0"/>
+          <a:chOff x="0" y="0"/>
+          <a:chExt cx="0" cy="0"/>
+        </a:xfrm>
+      </p:grpSpPr>
+      <p:sp>
+        <p:nvSpPr>
+          <p:cNvPr id="5" name="內容版面配置區 4">
+            <a:extLst>
+              <a:ext uri="{FF2B5EF4-FFF2-40B4-BE49-F238E27FC236}">
+                <a16:creationId xmlns:a16="http://schemas.microsoft.com/office/drawing/2014/main" id="{D65ECE23-6698-B581-3849-0C513D77A77F}"/>
+              </a:ext>
+            </a:extLst>
+          </p:cNvPr>
+          <p:cNvSpPr>
+            <a:spLocks noGrp="1"/>
+          </p:cNvSpPr>
+          <p:nvPr>
+            <p:ph idx="1"/>
+          </p:nvPr>
+        </p:nvSpPr>
+        <p:spPr>
+          <a:xfrm>
+            <a:off x="0" y="2084853"/>
+            <a:ext cx="12192000" cy="2404863"/>
+          </a:xfrm>
+        </p:spPr>
+        <p:txBody>
+          <a:bodyPr anchor="ctr">
+            <a:normAutofit/>
+          </a:bodyPr>
+          <a:lstStyle/>
+          <a:p>
+            <a:pPr marL="0" indent="0" algn="ctr">
+              <a:buNone/>
+            </a:pPr>
+            <a:r>
+              <a:rPr lang="zh-TW" altLang="en-US" sz="6400" b="1" dirty="0">
+                <a:solidFill>
+                  <a:srgbClr val="660033"/>
+                </a:solidFill>
+                <a:latin typeface="Microsoft JhengHei" pitchFamily="34" charset="-120"/>
+                <a:ea typeface="Microsoft JhengHei" pitchFamily="34" charset="-120"/>
+              </a:rPr>
+              <a:t>到遠方  傳福音  我必去  我必去</a:t>
+            </a:r>
+          </a:p>
+          <a:p>
+            <a:pPr marL="0" indent="0" algn="ctr">
+              <a:buNone/>
+            </a:pPr>
+            <a:r>
+              <a:rPr lang="zh-TW" altLang="en-US" sz="6400" b="1" dirty="0">
+                <a:solidFill>
+                  <a:srgbClr val="660033"/>
+                </a:solidFill>
+                <a:latin typeface="Microsoft JhengHei" pitchFamily="34" charset="-120"/>
+                <a:ea typeface="Microsoft JhengHei" pitchFamily="34" charset="-120"/>
+              </a:rPr>
+              <a:t>至世界  全世界  普及救恩真理</a:t>
+            </a:r>
+          </a:p>
+        </p:txBody>
+      </p:sp>
+    </p:spTree>
+    <p:extLst>
+      <p:ext uri="{BB962C8B-B14F-4D97-AF65-F5344CB8AC3E}">
+        <p14:creationId xmlns:p14="http://schemas.microsoft.com/office/powerpoint/2010/main" val="3794869044"/>
       </p:ext>
     </p:extLst>
   </p:cSld>
@@ -4014,196 +4323,100 @@
       </p:grpSpPr>
       <p:sp>
         <p:nvSpPr>
-          <p:cNvPr id="4" name="Title 3"/>
-          <p:cNvSpPr>
-            <a:spLocks noGrp="1"/>
-          </p:cNvSpPr>
-          <p:nvPr>
-            <p:ph type="title"/>
-          </p:nvPr>
-        </p:nvSpPr>
-        <p:spPr/>
-        <p:txBody>
-          <a:bodyPr>
+          <p:cNvPr id="5" name="內容版面配置區 4"/>
+          <p:cNvSpPr>
+            <a:spLocks noGrp="1"/>
+          </p:cNvSpPr>
+          <p:nvPr>
+            <p:ph idx="1"/>
+          </p:nvPr>
+        </p:nvSpPr>
+        <p:spPr>
+          <a:xfrm>
+            <a:off x="0" y="2084853"/>
+            <a:ext cx="12192000" cy="2404863"/>
+          </a:xfrm>
+        </p:spPr>
+        <p:txBody>
+          <a:bodyPr anchor="ctr">
             <a:normAutofit/>
           </a:bodyPr>
           <a:lstStyle/>
           <a:p>
-            <a:r>
-              <a:rPr lang="en-US" altLang="zh-CN" sz="4800" b="1" dirty="0">
+            <a:pPr marL="0" indent="0" algn="ctr">
+              <a:buNone/>
+            </a:pPr>
+            <a:r>
+              <a:rPr lang="zh-TW" altLang="en-US" sz="6400" b="1" dirty="0">
                 <a:solidFill>
-                  <a:srgbClr val="002060"/>
+                  <a:srgbClr val="660033"/>
                 </a:solidFill>
-                <a:latin typeface="Microsoft JhengHei" panose="020B0604030504040204" pitchFamily="34" charset="-120"/>
-                <a:ea typeface="Microsoft JhengHei" panose="020B0604030504040204" pitchFamily="34" charset="-120"/>
+                <a:latin typeface="Microsoft JhengHei" pitchFamily="34" charset="-120"/>
+                <a:ea typeface="Microsoft JhengHei" pitchFamily="34" charset="-120"/>
               </a:rPr>
-              <a:t>【</a:t>
-            </a:r>
-            <a:r>
-              <a:rPr lang="zh-CN" altLang="en-US" sz="4800" b="1" dirty="0">
+              <a:t>到遙遠之地方  我必去  我必去</a:t>
+            </a:r>
+          </a:p>
+          <a:p>
+            <a:pPr marL="0" indent="0" algn="ctr">
+              <a:buNone/>
+            </a:pPr>
+            <a:r>
+              <a:rPr lang="zh-TW" altLang="en-US" sz="6400" b="1" dirty="0">
                 <a:solidFill>
-                  <a:srgbClr val="002060"/>
+                  <a:srgbClr val="660033"/>
                 </a:solidFill>
-                <a:latin typeface="Microsoft JhengHei" panose="020B0604030504040204" pitchFamily="34" charset="-120"/>
-                <a:ea typeface="Microsoft JhengHei" panose="020B0604030504040204" pitchFamily="34" charset="-120"/>
+                <a:latin typeface="Microsoft JhengHei" pitchFamily="34" charset="-120"/>
+                <a:ea typeface="Microsoft JhengHei" pitchFamily="34" charset="-120"/>
               </a:rPr>
-              <a:t>到遙遠地方</a:t>
-            </a:r>
-            <a:r>
-              <a:rPr lang="en-US" altLang="zh-CN" sz="4800" b="1" dirty="0">
+              <a:t>那處從未聞福音道理</a:t>
+            </a:r>
+          </a:p>
+        </p:txBody>
+      </p:sp>
+      <p:sp>
+        <p:nvSpPr>
+          <p:cNvPr id="3" name="TextBox 2"/>
+          <p:cNvSpPr txBox="1"/>
+          <p:nvPr/>
+        </p:nvSpPr>
+        <p:spPr>
+          <a:xfrm>
+            <a:off x="0" y="5061183"/>
+            <a:ext cx="12192000" cy="584775"/>
+          </a:xfrm>
+          <a:prstGeom prst="rect">
+            <a:avLst/>
+          </a:prstGeom>
+          <a:noFill/>
+        </p:spPr>
+        <p:txBody>
+          <a:bodyPr wrap="square" rtlCol="0">
+            <a:spAutoFit/>
+          </a:bodyPr>
+          <a:lstStyle/>
+          <a:p>
+            <a:pPr algn="ctr"/>
+            <a:r>
+              <a:rPr lang="en-US" sz="3200" b="1" dirty="0">
                 <a:solidFill>
-                  <a:srgbClr val="002060"/>
+                  <a:srgbClr val="660033"/>
                 </a:solidFill>
-                <a:latin typeface="Microsoft JhengHei" panose="020B0604030504040204" pitchFamily="34" charset="-120"/>
-                <a:ea typeface="Microsoft JhengHei" panose="020B0604030504040204" pitchFamily="34" charset="-120"/>
               </a:rPr>
-              <a:t>】</a:t>
-            </a:r>
-          </a:p>
-        </p:txBody>
-      </p:sp>
-      <p:sp>
-        <p:nvSpPr>
-          <p:cNvPr id="5" name="Content Placeholder 4"/>
-          <p:cNvSpPr>
-            <a:spLocks noGrp="1"/>
-          </p:cNvSpPr>
-          <p:nvPr>
-            <p:ph idx="1"/>
-          </p:nvPr>
-        </p:nvSpPr>
-        <p:spPr/>
-        <p:txBody>
-          <a:bodyPr>
-            <a:normAutofit/>
-          </a:bodyPr>
-          <a:lstStyle/>
-          <a:p>
-            <a:pPr marL="0" indent="0" algn="ctr">
-              <a:buNone/>
-            </a:pPr>
-            <a:r>
-              <a:rPr lang="zh-TW" altLang="en-US" sz="5400" b="1" dirty="0">
-                <a:solidFill>
-                  <a:srgbClr val="002060"/>
-                </a:solidFill>
-                <a:latin typeface="Microsoft JhengHei" panose="020B0604030504040204" pitchFamily="34" charset="-120"/>
-                <a:ea typeface="Microsoft JhengHei" panose="020B0604030504040204" pitchFamily="34" charset="-120"/>
-              </a:rPr>
-              <a:t>到遠</a:t>
-            </a:r>
-            <a:r>
-              <a:rPr lang="zh-TW" altLang="en-US" sz="5400" b="1" dirty="0">
-                <a:solidFill>
-                  <a:srgbClr val="002060"/>
-                </a:solidFill>
-                <a:latin typeface="Microsoft JhengHei" panose="020B0604030504040204" pitchFamily="34" charset="-120"/>
-                <a:ea typeface="Microsoft JhengHei" panose="020B0604030504040204" pitchFamily="34" charset="-120"/>
-              </a:rPr>
-              <a:t>方  傳</a:t>
-            </a:r>
-            <a:r>
-              <a:rPr lang="zh-TW" altLang="en-US" sz="5400" b="1" dirty="0">
-                <a:solidFill>
-                  <a:srgbClr val="002060"/>
-                </a:solidFill>
-                <a:latin typeface="Microsoft JhengHei" panose="020B0604030504040204" pitchFamily="34" charset="-120"/>
-                <a:ea typeface="Microsoft JhengHei" panose="020B0604030504040204" pitchFamily="34" charset="-120"/>
-              </a:rPr>
-              <a:t>福音</a:t>
-            </a:r>
-          </a:p>
-          <a:p>
-            <a:pPr marL="0" indent="0" algn="ctr">
-              <a:buNone/>
-            </a:pPr>
-            <a:r>
-              <a:rPr lang="zh-TW" altLang="en-US" sz="5400" b="1" dirty="0">
-                <a:solidFill>
-                  <a:srgbClr val="002060"/>
-                </a:solidFill>
-                <a:latin typeface="Microsoft JhengHei" panose="020B0604030504040204" pitchFamily="34" charset="-120"/>
-                <a:ea typeface="Microsoft JhengHei" panose="020B0604030504040204" pitchFamily="34" charset="-120"/>
-              </a:rPr>
-              <a:t>我必</a:t>
-            </a:r>
-            <a:r>
-              <a:rPr lang="zh-TW" altLang="en-US" sz="5400" b="1" dirty="0">
-                <a:solidFill>
-                  <a:srgbClr val="002060"/>
-                </a:solidFill>
-                <a:latin typeface="Microsoft JhengHei" panose="020B0604030504040204" pitchFamily="34" charset="-120"/>
-                <a:ea typeface="Microsoft JhengHei" panose="020B0604030504040204" pitchFamily="34" charset="-120"/>
-              </a:rPr>
-              <a:t>去  我</a:t>
-            </a:r>
-            <a:r>
-              <a:rPr lang="zh-TW" altLang="en-US" sz="5400" b="1" dirty="0">
-                <a:solidFill>
-                  <a:srgbClr val="002060"/>
-                </a:solidFill>
-                <a:latin typeface="Microsoft JhengHei" panose="020B0604030504040204" pitchFamily="34" charset="-120"/>
-                <a:ea typeface="Microsoft JhengHei" panose="020B0604030504040204" pitchFamily="34" charset="-120"/>
-              </a:rPr>
-              <a:t>必去</a:t>
-            </a:r>
-          </a:p>
-          <a:p>
-            <a:pPr marL="0" indent="0" algn="ctr">
-              <a:buNone/>
-            </a:pPr>
-            <a:r>
-              <a:rPr lang="zh-TW" altLang="en-US" sz="5400" b="1" dirty="0">
-                <a:solidFill>
-                  <a:srgbClr val="002060"/>
-                </a:solidFill>
-                <a:latin typeface="Microsoft JhengHei" panose="020B0604030504040204" pitchFamily="34" charset="-120"/>
-                <a:ea typeface="Microsoft JhengHei" panose="020B0604030504040204" pitchFamily="34" charset="-120"/>
-              </a:rPr>
-              <a:t>至世</a:t>
-            </a:r>
-            <a:r>
-              <a:rPr lang="zh-TW" altLang="en-US" sz="5400" b="1" dirty="0">
-                <a:solidFill>
-                  <a:srgbClr val="002060"/>
-                </a:solidFill>
-                <a:latin typeface="Microsoft JhengHei" panose="020B0604030504040204" pitchFamily="34" charset="-120"/>
-                <a:ea typeface="Microsoft JhengHei" panose="020B0604030504040204" pitchFamily="34" charset="-120"/>
-              </a:rPr>
-              <a:t>界  全</a:t>
-            </a:r>
-            <a:r>
-              <a:rPr lang="zh-TW" altLang="en-US" sz="5400" b="1" dirty="0">
-                <a:solidFill>
-                  <a:srgbClr val="002060"/>
-                </a:solidFill>
-                <a:latin typeface="Microsoft JhengHei" panose="020B0604030504040204" pitchFamily="34" charset="-120"/>
-                <a:ea typeface="Microsoft JhengHei" panose="020B0604030504040204" pitchFamily="34" charset="-120"/>
-              </a:rPr>
-              <a:t>世界</a:t>
-            </a:r>
-          </a:p>
-          <a:p>
-            <a:pPr marL="0" indent="0" algn="ctr">
-              <a:buNone/>
-            </a:pPr>
-            <a:r>
-              <a:rPr lang="zh-TW" altLang="en-US" sz="5400" b="1" dirty="0">
-                <a:solidFill>
-                  <a:srgbClr val="002060"/>
-                </a:solidFill>
-                <a:latin typeface="Microsoft JhengHei" panose="020B0604030504040204" pitchFamily="34" charset="-120"/>
-                <a:ea typeface="Microsoft JhengHei" panose="020B0604030504040204" pitchFamily="34" charset="-120"/>
-              </a:rPr>
-              <a:t>普及救恩真理</a:t>
-            </a:r>
+              <a:t>( 1 / 4 )</a:t>
+            </a:r>
+            <a:endParaRPr lang="vi-VN" sz="3200" b="1" dirty="0">
+              <a:solidFill>
+                <a:srgbClr val="660033"/>
+              </a:solidFill>
+            </a:endParaRPr>
           </a:p>
         </p:txBody>
       </p:sp>
     </p:spTree>
     <p:extLst>
       <p:ext uri="{BB962C8B-B14F-4D97-AF65-F5344CB8AC3E}">
-        <p14:creationId xmlns:p14="http://schemas.microsoft.com/office/powerpoint/2010/main" val="244057083"/>
+        <p14:creationId xmlns:p14="http://schemas.microsoft.com/office/powerpoint/2010/main" val="1816895717"/>
       </p:ext>
     </p:extLst>
   </p:cSld>
@@ -4218,7 +4431,13 @@
   <p:cSld>
     <p:spTree>
       <p:nvGrpSpPr>
-        <p:cNvPr id="1" name=""/>
+        <p:cNvPr id="1" name="">
+          <a:extLst>
+            <a:ext uri="{FF2B5EF4-FFF2-40B4-BE49-F238E27FC236}">
+              <a16:creationId xmlns:a16="http://schemas.microsoft.com/office/drawing/2014/main" id="{7AFFC05F-C2CD-3068-72BA-3D2A3DB76DAD}"/>
+            </a:ext>
+          </a:extLst>
+        </p:cNvPr>
         <p:cNvGrpSpPr/>
         <p:nvPr/>
       </p:nvGrpSpPr>
@@ -4232,252 +4451,103 @@
       </p:grpSpPr>
       <p:sp>
         <p:nvSpPr>
-          <p:cNvPr id="4" name="Title 3"/>
-          <p:cNvSpPr>
-            <a:spLocks noGrp="1"/>
-          </p:cNvSpPr>
-          <p:nvPr>
-            <p:ph type="title"/>
-          </p:nvPr>
-        </p:nvSpPr>
-        <p:spPr/>
-        <p:txBody>
-          <a:bodyPr>
+          <p:cNvPr id="5" name="內容版面配置區 4">
+            <a:extLst>
+              <a:ext uri="{FF2B5EF4-FFF2-40B4-BE49-F238E27FC236}">
+                <a16:creationId xmlns:a16="http://schemas.microsoft.com/office/drawing/2014/main" id="{0CFABDE3-8E88-5423-9613-238A49B30C5F}"/>
+              </a:ext>
+            </a:extLst>
+          </p:cNvPr>
+          <p:cNvSpPr>
+            <a:spLocks noGrp="1"/>
+          </p:cNvSpPr>
+          <p:nvPr>
+            <p:ph idx="1"/>
+          </p:nvPr>
+        </p:nvSpPr>
+        <p:spPr>
+          <a:xfrm>
+            <a:off x="0" y="2084853"/>
+            <a:ext cx="12192000" cy="2404863"/>
+          </a:xfrm>
+        </p:spPr>
+        <p:txBody>
+          <a:bodyPr anchor="ctr">
             <a:normAutofit/>
           </a:bodyPr>
           <a:lstStyle/>
           <a:p>
-            <a:r>
-              <a:rPr lang="en-US" altLang="zh-CN" sz="4800" b="1" dirty="0">
+            <a:pPr marL="0" indent="0" algn="ctr">
+              <a:buNone/>
+            </a:pPr>
+            <a:r>
+              <a:rPr lang="zh-TW" altLang="en-US" sz="6400" b="1" dirty="0">
                 <a:solidFill>
-                  <a:srgbClr val="002060"/>
+                  <a:srgbClr val="660033"/>
                 </a:solidFill>
-                <a:latin typeface="Microsoft JhengHei" panose="020B0604030504040204" pitchFamily="34" charset="-120"/>
-                <a:ea typeface="Microsoft JhengHei" panose="020B0604030504040204" pitchFamily="34" charset="-120"/>
+                <a:latin typeface="Microsoft JhengHei" pitchFamily="34" charset="-120"/>
+                <a:ea typeface="Microsoft JhengHei" pitchFamily="34" charset="-120"/>
               </a:rPr>
-              <a:t>【</a:t>
-            </a:r>
-            <a:r>
-              <a:rPr lang="zh-CN" altLang="en-US" sz="4800" b="1" dirty="0">
+              <a:t>千萬人還不知主仁愛與慈悲</a:t>
+            </a:r>
+          </a:p>
+          <a:p>
+            <a:pPr marL="0" indent="0" algn="ctr">
+              <a:buNone/>
+            </a:pPr>
+            <a:r>
+              <a:rPr lang="zh-TW" altLang="en-US" sz="6400" b="1" dirty="0">
                 <a:solidFill>
-                  <a:srgbClr val="002060"/>
+                  <a:srgbClr val="660033"/>
                 </a:solidFill>
-                <a:latin typeface="Microsoft JhengHei" panose="020B0604030504040204" pitchFamily="34" charset="-120"/>
-                <a:ea typeface="Microsoft JhengHei" panose="020B0604030504040204" pitchFamily="34" charset="-120"/>
+                <a:latin typeface="Microsoft JhengHei" pitchFamily="34" charset="-120"/>
+                <a:ea typeface="Microsoft JhengHei" pitchFamily="34" charset="-120"/>
               </a:rPr>
-              <a:t>到遙遠地方</a:t>
-            </a:r>
-            <a:r>
-              <a:rPr lang="en-US" altLang="zh-CN" sz="4800" b="1" dirty="0">
-                <a:solidFill>
-                  <a:srgbClr val="002060"/>
-                </a:solidFill>
-                <a:latin typeface="Microsoft JhengHei" panose="020B0604030504040204" pitchFamily="34" charset="-120"/>
-                <a:ea typeface="Microsoft JhengHei" panose="020B0604030504040204" pitchFamily="34" charset="-120"/>
-              </a:rPr>
-              <a:t>】</a:t>
-            </a:r>
-          </a:p>
-        </p:txBody>
-      </p:sp>
-      <p:sp>
-        <p:nvSpPr>
-          <p:cNvPr id="5" name="Content Placeholder 4"/>
-          <p:cNvSpPr>
-            <a:spLocks noGrp="1"/>
-          </p:cNvSpPr>
-          <p:nvPr>
-            <p:ph idx="1"/>
-          </p:nvPr>
-        </p:nvSpPr>
-        <p:spPr/>
-        <p:txBody>
-          <a:bodyPr>
-            <a:normAutofit/>
-          </a:bodyPr>
-          <a:lstStyle/>
-          <a:p>
-            <a:pPr marL="0" indent="0" algn="ctr">
-              <a:buNone/>
-            </a:pPr>
-            <a:r>
-              <a:rPr lang="zh-TW" altLang="en-US" sz="5400" b="1" dirty="0">
-                <a:solidFill>
-                  <a:srgbClr val="002060"/>
-                </a:solidFill>
-                <a:latin typeface="Microsoft JhengHei" panose="020B0604030504040204" pitchFamily="34" charset="-120"/>
-                <a:ea typeface="Microsoft JhengHei" panose="020B0604030504040204" pitchFamily="34" charset="-120"/>
-              </a:rPr>
-              <a:t>耶穌差遣我</a:t>
-            </a:r>
-            <a:r>
-              <a:rPr lang="zh-TW" altLang="en-US" sz="5400" b="1" dirty="0">
-                <a:solidFill>
-                  <a:srgbClr val="002060"/>
-                </a:solidFill>
-                <a:latin typeface="Microsoft JhengHei" panose="020B0604030504040204" pitchFamily="34" charset="-120"/>
-                <a:ea typeface="Microsoft JhengHei" panose="020B0604030504040204" pitchFamily="34" charset="-120"/>
-              </a:rPr>
-              <a:t>去  那</a:t>
-            </a:r>
-            <a:r>
-              <a:rPr lang="zh-TW" altLang="en-US" sz="5400" b="1" dirty="0">
-                <a:solidFill>
-                  <a:srgbClr val="002060"/>
-                </a:solidFill>
-                <a:latin typeface="Microsoft JhengHei" panose="020B0604030504040204" pitchFamily="34" charset="-120"/>
-                <a:ea typeface="Microsoft JhengHei" panose="020B0604030504040204" pitchFamily="34" charset="-120"/>
-              </a:rPr>
-              <a:t>最窮苦之地</a:t>
-            </a:r>
-          </a:p>
-          <a:p>
-            <a:pPr marL="0" indent="0" algn="ctr">
-              <a:buNone/>
-            </a:pPr>
-            <a:r>
-              <a:rPr lang="zh-TW" altLang="en-US" sz="5400" b="1" dirty="0">
-                <a:solidFill>
-                  <a:srgbClr val="002060"/>
-                </a:solidFill>
-                <a:latin typeface="Microsoft JhengHei" panose="020B0604030504040204" pitchFamily="34" charset="-120"/>
-                <a:ea typeface="Microsoft JhengHei" panose="020B0604030504040204" pitchFamily="34" charset="-120"/>
-              </a:rPr>
-              <a:t>切莫想怎樣體貼自</a:t>
-            </a:r>
-            <a:r>
-              <a:rPr lang="zh-TW" altLang="en-US" sz="5400" b="1" dirty="0">
-                <a:solidFill>
-                  <a:srgbClr val="002060"/>
-                </a:solidFill>
-                <a:latin typeface="Microsoft JhengHei" panose="020B0604030504040204" pitchFamily="34" charset="-120"/>
-                <a:ea typeface="Microsoft JhengHei" panose="020B0604030504040204" pitchFamily="34" charset="-120"/>
-              </a:rPr>
-              <a:t>己</a:t>
-            </a:r>
-            <a:endParaRPr lang="en-US" altLang="zh-TW" sz="5400" b="1" dirty="0">
-              <a:solidFill>
-                <a:srgbClr val="002060"/>
-              </a:solidFill>
-              <a:latin typeface="Microsoft JhengHei" panose="020B0604030504040204" pitchFamily="34" charset="-120"/>
-              <a:ea typeface="Microsoft JhengHei" panose="020B0604030504040204" pitchFamily="34" charset="-120"/>
-            </a:endParaRPr>
-          </a:p>
-          <a:p>
-            <a:pPr marL="0" indent="0" algn="ctr">
-              <a:buNone/>
-            </a:pPr>
-            <a:r>
-              <a:rPr lang="zh-TW" altLang="en-US" sz="5400" b="1" dirty="0">
-                <a:solidFill>
-                  <a:srgbClr val="002060"/>
-                </a:solidFill>
-                <a:latin typeface="Microsoft JhengHei" panose="020B0604030504040204" pitchFamily="34" charset="-120"/>
-                <a:ea typeface="Microsoft JhengHei" panose="020B0604030504040204" pitchFamily="34" charset="-120"/>
-              </a:rPr>
-              <a:t>世上人都以</a:t>
-            </a:r>
-            <a:r>
-              <a:rPr lang="zh-TW" altLang="en-US" sz="5400" b="1" dirty="0">
-                <a:solidFill>
-                  <a:srgbClr val="002060"/>
-                </a:solidFill>
-                <a:latin typeface="Microsoft JhengHei" panose="020B0604030504040204" pitchFamily="34" charset="-120"/>
-                <a:ea typeface="Microsoft JhengHei" panose="020B0604030504040204" pitchFamily="34" charset="-120"/>
-              </a:rPr>
-              <a:t>我為</a:t>
-            </a:r>
-            <a:r>
-              <a:rPr lang="zh-TW" altLang="en-US" sz="5400" b="1" dirty="0">
-                <a:solidFill>
-                  <a:srgbClr val="002060"/>
-                </a:solidFill>
-                <a:latin typeface="Microsoft JhengHei" panose="020B0604030504040204" pitchFamily="34" charset="-120"/>
-                <a:ea typeface="Microsoft JhengHei" panose="020B0604030504040204" pitchFamily="34" charset="-120"/>
-              </a:rPr>
-              <a:t>迷夢為大愚</a:t>
-            </a:r>
-          </a:p>
-          <a:p>
-            <a:pPr marL="0" indent="0" algn="ctr">
-              <a:buNone/>
-            </a:pPr>
-            <a:r>
-              <a:rPr lang="zh-TW" altLang="en-US" sz="5400" b="1" dirty="0">
-                <a:solidFill>
-                  <a:srgbClr val="002060"/>
-                </a:solidFill>
-                <a:latin typeface="Microsoft JhengHei" panose="020B0604030504040204" pitchFamily="34" charset="-120"/>
-                <a:ea typeface="Microsoft JhengHei" panose="020B0604030504040204" pitchFamily="34" charset="-120"/>
-              </a:rPr>
-              <a:t>但願主喜悅萬事足</a:t>
-            </a:r>
-            <a:r>
-              <a:rPr lang="zh-TW" altLang="en-US" sz="5400" b="1" dirty="0">
-                <a:solidFill>
-                  <a:srgbClr val="002060"/>
-                </a:solidFill>
-                <a:latin typeface="Microsoft JhengHei" panose="020B0604030504040204" pitchFamily="34" charset="-120"/>
-                <a:ea typeface="Microsoft JhengHei" panose="020B0604030504040204" pitchFamily="34" charset="-120"/>
-              </a:rPr>
-              <a:t>矣</a:t>
-            </a:r>
-            <a:endParaRPr lang="zh-TW" altLang="en-US" sz="5400" b="1" dirty="0">
-              <a:solidFill>
-                <a:srgbClr val="002060"/>
-              </a:solidFill>
-              <a:latin typeface="Microsoft JhengHei" panose="020B0604030504040204" pitchFamily="34" charset="-120"/>
-              <a:ea typeface="Microsoft JhengHei" panose="020B0604030504040204" pitchFamily="34" charset="-120"/>
-            </a:endParaRPr>
-          </a:p>
-        </p:txBody>
-      </p:sp>
-      <p:sp>
-        <p:nvSpPr>
-          <p:cNvPr id="6" name="Text Box 1"/>
+              <a:t>急傳此嘉音勿再猶疑</a:t>
+            </a:r>
+          </a:p>
+        </p:txBody>
+      </p:sp>
+      <p:sp>
+        <p:nvSpPr>
+          <p:cNvPr id="3" name="TextBox 2">
+            <a:extLst>
+              <a:ext uri="{FF2B5EF4-FFF2-40B4-BE49-F238E27FC236}">
+                <a16:creationId xmlns:a16="http://schemas.microsoft.com/office/drawing/2014/main" id="{7FB13813-D463-5E40-B68B-365D2C782107}"/>
+              </a:ext>
+            </a:extLst>
+          </p:cNvPr>
           <p:cNvSpPr txBox="1"/>
           <p:nvPr/>
         </p:nvSpPr>
         <p:spPr>
           <a:xfrm>
-            <a:off x="153888" y="1700808"/>
-            <a:ext cx="911424" cy="923330"/>
+            <a:off x="0" y="5061183"/>
+            <a:ext cx="12192000" cy="584775"/>
           </a:xfrm>
           <a:prstGeom prst="rect">
             <a:avLst/>
           </a:prstGeom>
           <a:noFill/>
-          <a:ln w="9525">
-            <a:noFill/>
-            <a:miter lim="800000"/>
-          </a:ln>
         </p:spPr>
         <p:txBody>
-          <a:bodyPr wrap="square">
+          <a:bodyPr wrap="square" rtlCol="0">
             <a:spAutoFit/>
           </a:bodyPr>
           <a:lstStyle/>
           <a:p>
             <a:pPr algn="ctr"/>
             <a:r>
-              <a:rPr lang="en-US" sz="5400" b="1" dirty="0">
+              <a:rPr lang="en-US" sz="3200" b="1" dirty="0">
                 <a:solidFill>
-                  <a:srgbClr val="002060"/>
+                  <a:srgbClr val="660033"/>
                 </a:solidFill>
               </a:rPr>
-              <a:t>2</a:t>
-            </a:r>
-            <a:r>
-              <a:rPr lang="en-US" sz="5400" b="1" dirty="0" smtClean="0">
-                <a:solidFill>
-                  <a:srgbClr val="002060"/>
-                </a:solidFill>
-              </a:rPr>
-              <a:t>.</a:t>
-            </a:r>
-            <a:endParaRPr lang="en-US" sz="5400" b="1" dirty="0">
+              <a:t>( 1 / 4 )</a:t>
+            </a:r>
+            <a:endParaRPr lang="vi-VN" sz="3200" b="1" dirty="0">
               <a:solidFill>
-                <a:srgbClr val="002060"/>
+                <a:srgbClr val="660033"/>
               </a:solidFill>
             </a:endParaRPr>
           </a:p>
@@ -4486,7 +4556,7 @@
     </p:spTree>
     <p:extLst>
       <p:ext uri="{BB962C8B-B14F-4D97-AF65-F5344CB8AC3E}">
-        <p14:creationId xmlns:p14="http://schemas.microsoft.com/office/powerpoint/2010/main" val="2984356759"/>
+        <p14:creationId xmlns:p14="http://schemas.microsoft.com/office/powerpoint/2010/main" val="3383106358"/>
       </p:ext>
     </p:extLst>
   </p:cSld>
@@ -4501,7 +4571,13 @@
   <p:cSld>
     <p:spTree>
       <p:nvGrpSpPr>
-        <p:cNvPr id="1" name=""/>
+        <p:cNvPr id="1" name="">
+          <a:extLst>
+            <a:ext uri="{FF2B5EF4-FFF2-40B4-BE49-F238E27FC236}">
+              <a16:creationId xmlns:a16="http://schemas.microsoft.com/office/drawing/2014/main" id="{5AC09E14-E19A-5E67-891D-A1A957F308A7}"/>
+            </a:ext>
+          </a:extLst>
+        </p:cNvPr>
         <p:cNvGrpSpPr/>
         <p:nvPr/>
       </p:nvGrpSpPr>
@@ -4515,188 +4591,59 @@
       </p:grpSpPr>
       <p:sp>
         <p:nvSpPr>
-          <p:cNvPr id="4" name="Title 3"/>
-          <p:cNvSpPr>
-            <a:spLocks noGrp="1"/>
-          </p:cNvSpPr>
-          <p:nvPr>
-            <p:ph type="title"/>
-          </p:nvPr>
-        </p:nvSpPr>
-        <p:spPr/>
-        <p:txBody>
-          <a:bodyPr>
+          <p:cNvPr id="5" name="內容版面配置區 4">
+            <a:extLst>
+              <a:ext uri="{FF2B5EF4-FFF2-40B4-BE49-F238E27FC236}">
+                <a16:creationId xmlns:a16="http://schemas.microsoft.com/office/drawing/2014/main" id="{02E2F58D-68FE-E372-4E87-1478F2ACB9E6}"/>
+              </a:ext>
+            </a:extLst>
+          </p:cNvPr>
+          <p:cNvSpPr>
+            <a:spLocks noGrp="1"/>
+          </p:cNvSpPr>
+          <p:nvPr>
+            <p:ph idx="1"/>
+          </p:nvPr>
+        </p:nvSpPr>
+        <p:spPr>
+          <a:xfrm>
+            <a:off x="0" y="2084853"/>
+            <a:ext cx="12192000" cy="2404863"/>
+          </a:xfrm>
+        </p:spPr>
+        <p:txBody>
+          <a:bodyPr anchor="ctr">
             <a:normAutofit/>
           </a:bodyPr>
           <a:lstStyle/>
           <a:p>
-            <a:r>
-              <a:rPr lang="en-US" altLang="zh-CN" sz="4800" b="1" dirty="0">
+            <a:pPr marL="0" indent="0" algn="ctr">
+              <a:buNone/>
+            </a:pPr>
+            <a:r>
+              <a:rPr lang="zh-TW" altLang="en-US" sz="6400" b="1" dirty="0">
                 <a:solidFill>
-                  <a:srgbClr val="002060"/>
+                  <a:srgbClr val="660033"/>
                 </a:solidFill>
-                <a:latin typeface="Microsoft JhengHei" panose="020B0604030504040204" pitchFamily="34" charset="-120"/>
-                <a:ea typeface="Microsoft JhengHei" panose="020B0604030504040204" pitchFamily="34" charset="-120"/>
+                <a:latin typeface="Microsoft JhengHei" pitchFamily="34" charset="-120"/>
+                <a:ea typeface="Microsoft JhengHei" pitchFamily="34" charset="-120"/>
               </a:rPr>
-              <a:t>【</a:t>
-            </a:r>
-            <a:r>
-              <a:rPr lang="zh-CN" altLang="en-US" sz="4800" b="1" dirty="0">
+              <a:t>到遠方  傳福音  我必去  我必去</a:t>
+            </a:r>
+          </a:p>
+          <a:p>
+            <a:pPr marL="0" indent="0" algn="ctr">
+              <a:buNone/>
+            </a:pPr>
+            <a:r>
+              <a:rPr lang="zh-TW" altLang="en-US" sz="6400" b="1" dirty="0">
                 <a:solidFill>
-                  <a:srgbClr val="002060"/>
+                  <a:srgbClr val="660033"/>
                 </a:solidFill>
-                <a:latin typeface="Microsoft JhengHei" panose="020B0604030504040204" pitchFamily="34" charset="-120"/>
-                <a:ea typeface="Microsoft JhengHei" panose="020B0604030504040204" pitchFamily="34" charset="-120"/>
+                <a:latin typeface="Microsoft JhengHei" pitchFamily="34" charset="-120"/>
+                <a:ea typeface="Microsoft JhengHei" pitchFamily="34" charset="-120"/>
               </a:rPr>
-              <a:t>到遙遠地方</a:t>
-            </a:r>
-            <a:r>
-              <a:rPr lang="en-US" altLang="zh-CN" sz="4800" b="1" dirty="0">
-                <a:solidFill>
-                  <a:srgbClr val="002060"/>
-                </a:solidFill>
-                <a:latin typeface="Microsoft JhengHei" panose="020B0604030504040204" pitchFamily="34" charset="-120"/>
-                <a:ea typeface="Microsoft JhengHei" panose="020B0604030504040204" pitchFamily="34" charset="-120"/>
-              </a:rPr>
-              <a:t>】</a:t>
-            </a:r>
-          </a:p>
-        </p:txBody>
-      </p:sp>
-      <p:sp>
-        <p:nvSpPr>
-          <p:cNvPr id="5" name="Content Placeholder 4"/>
-          <p:cNvSpPr>
-            <a:spLocks noGrp="1"/>
-          </p:cNvSpPr>
-          <p:nvPr>
-            <p:ph idx="1"/>
-          </p:nvPr>
-        </p:nvSpPr>
-        <p:spPr/>
-        <p:txBody>
-          <a:bodyPr>
-            <a:normAutofit/>
-          </a:bodyPr>
-          <a:lstStyle/>
-          <a:p>
-            <a:pPr marL="0" indent="0" algn="ctr">
-              <a:buNone/>
-            </a:pPr>
-            <a:r>
-              <a:rPr lang="zh-TW" altLang="en-US" sz="5400" b="1" dirty="0">
-                <a:solidFill>
-                  <a:srgbClr val="002060"/>
-                </a:solidFill>
-                <a:latin typeface="Microsoft JhengHei" panose="020B0604030504040204" pitchFamily="34" charset="-120"/>
-                <a:ea typeface="Microsoft JhengHei" panose="020B0604030504040204" pitchFamily="34" charset="-120"/>
-              </a:rPr>
-              <a:t>到遠</a:t>
-            </a:r>
-            <a:r>
-              <a:rPr lang="zh-TW" altLang="en-US" sz="5400" b="1" dirty="0">
-                <a:solidFill>
-                  <a:srgbClr val="002060"/>
-                </a:solidFill>
-                <a:latin typeface="Microsoft JhengHei" panose="020B0604030504040204" pitchFamily="34" charset="-120"/>
-                <a:ea typeface="Microsoft JhengHei" panose="020B0604030504040204" pitchFamily="34" charset="-120"/>
-              </a:rPr>
-              <a:t>方  傳</a:t>
-            </a:r>
-            <a:r>
-              <a:rPr lang="zh-TW" altLang="en-US" sz="5400" b="1" dirty="0">
-                <a:solidFill>
-                  <a:srgbClr val="002060"/>
-                </a:solidFill>
-                <a:latin typeface="Microsoft JhengHei" panose="020B0604030504040204" pitchFamily="34" charset="-120"/>
-                <a:ea typeface="Microsoft JhengHei" panose="020B0604030504040204" pitchFamily="34" charset="-120"/>
-              </a:rPr>
-              <a:t>福音</a:t>
-            </a:r>
-          </a:p>
-          <a:p>
-            <a:pPr marL="0" indent="0" algn="ctr">
-              <a:buNone/>
-            </a:pPr>
-            <a:r>
-              <a:rPr lang="zh-TW" altLang="en-US" sz="5400" b="1" dirty="0">
-                <a:solidFill>
-                  <a:srgbClr val="002060"/>
-                </a:solidFill>
-                <a:latin typeface="Microsoft JhengHei" panose="020B0604030504040204" pitchFamily="34" charset="-120"/>
-                <a:ea typeface="Microsoft JhengHei" panose="020B0604030504040204" pitchFamily="34" charset="-120"/>
-              </a:rPr>
-              <a:t>我必</a:t>
-            </a:r>
-            <a:r>
-              <a:rPr lang="zh-TW" altLang="en-US" sz="5400" b="1" dirty="0">
-                <a:solidFill>
-                  <a:srgbClr val="002060"/>
-                </a:solidFill>
-                <a:latin typeface="Microsoft JhengHei" panose="020B0604030504040204" pitchFamily="34" charset="-120"/>
-                <a:ea typeface="Microsoft JhengHei" panose="020B0604030504040204" pitchFamily="34" charset="-120"/>
-              </a:rPr>
-              <a:t>去  我</a:t>
-            </a:r>
-            <a:r>
-              <a:rPr lang="zh-TW" altLang="en-US" sz="5400" b="1" dirty="0">
-                <a:solidFill>
-                  <a:srgbClr val="002060"/>
-                </a:solidFill>
-                <a:latin typeface="Microsoft JhengHei" panose="020B0604030504040204" pitchFamily="34" charset="-120"/>
-                <a:ea typeface="Microsoft JhengHei" panose="020B0604030504040204" pitchFamily="34" charset="-120"/>
-              </a:rPr>
-              <a:t>必去</a:t>
-            </a:r>
-          </a:p>
-          <a:p>
-            <a:pPr marL="0" indent="0" algn="ctr">
-              <a:buNone/>
-            </a:pPr>
-            <a:r>
-              <a:rPr lang="zh-TW" altLang="en-US" sz="5400" b="1" dirty="0">
-                <a:solidFill>
-                  <a:srgbClr val="002060"/>
-                </a:solidFill>
-                <a:latin typeface="Microsoft JhengHei" panose="020B0604030504040204" pitchFamily="34" charset="-120"/>
-                <a:ea typeface="Microsoft JhengHei" panose="020B0604030504040204" pitchFamily="34" charset="-120"/>
-              </a:rPr>
-              <a:t>至世</a:t>
-            </a:r>
-            <a:r>
-              <a:rPr lang="zh-TW" altLang="en-US" sz="5400" b="1" dirty="0">
-                <a:solidFill>
-                  <a:srgbClr val="002060"/>
-                </a:solidFill>
-                <a:latin typeface="Microsoft JhengHei" panose="020B0604030504040204" pitchFamily="34" charset="-120"/>
-                <a:ea typeface="Microsoft JhengHei" panose="020B0604030504040204" pitchFamily="34" charset="-120"/>
-              </a:rPr>
-              <a:t>界  全</a:t>
-            </a:r>
-            <a:r>
-              <a:rPr lang="zh-TW" altLang="en-US" sz="5400" b="1" dirty="0">
-                <a:solidFill>
-                  <a:srgbClr val="002060"/>
-                </a:solidFill>
-                <a:latin typeface="Microsoft JhengHei" panose="020B0604030504040204" pitchFamily="34" charset="-120"/>
-                <a:ea typeface="Microsoft JhengHei" panose="020B0604030504040204" pitchFamily="34" charset="-120"/>
-              </a:rPr>
-              <a:t>世界</a:t>
-            </a:r>
-          </a:p>
-          <a:p>
-            <a:pPr marL="0" indent="0" algn="ctr">
-              <a:buNone/>
-            </a:pPr>
-            <a:r>
-              <a:rPr lang="zh-TW" altLang="en-US" sz="5400" b="1" dirty="0">
-                <a:solidFill>
-                  <a:srgbClr val="002060"/>
-                </a:solidFill>
-                <a:latin typeface="Microsoft JhengHei" panose="020B0604030504040204" pitchFamily="34" charset="-120"/>
-                <a:ea typeface="Microsoft JhengHei" panose="020B0604030504040204" pitchFamily="34" charset="-120"/>
-              </a:rPr>
-              <a:t>普及救恩真理</a:t>
+              <a:t>至世界  全世界  普及救恩真理</a:t>
             </a:r>
           </a:p>
         </p:txBody>
@@ -4704,7 +4651,7 @@
     </p:spTree>
     <p:extLst>
       <p:ext uri="{BB962C8B-B14F-4D97-AF65-F5344CB8AC3E}">
-        <p14:creationId xmlns:p14="http://schemas.microsoft.com/office/powerpoint/2010/main" val="3220015111"/>
+        <p14:creationId xmlns:p14="http://schemas.microsoft.com/office/powerpoint/2010/main" val="826135997"/>
       </p:ext>
     </p:extLst>
   </p:cSld>
@@ -4719,7 +4666,13 @@
   <p:cSld>
     <p:spTree>
       <p:nvGrpSpPr>
-        <p:cNvPr id="1" name=""/>
+        <p:cNvPr id="1" name="">
+          <a:extLst>
+            <a:ext uri="{FF2B5EF4-FFF2-40B4-BE49-F238E27FC236}">
+              <a16:creationId xmlns:a16="http://schemas.microsoft.com/office/drawing/2014/main" id="{0EB61D03-B97E-031C-437C-0EEF040A70E1}"/>
+            </a:ext>
+          </a:extLst>
+        </p:cNvPr>
         <p:cNvGrpSpPr/>
         <p:nvPr/>
       </p:nvGrpSpPr>
@@ -4733,252 +4686,103 @@
       </p:grpSpPr>
       <p:sp>
         <p:nvSpPr>
-          <p:cNvPr id="4" name="Title 3"/>
-          <p:cNvSpPr>
-            <a:spLocks noGrp="1"/>
-          </p:cNvSpPr>
-          <p:nvPr>
-            <p:ph type="title"/>
-          </p:nvPr>
-        </p:nvSpPr>
-        <p:spPr/>
-        <p:txBody>
-          <a:bodyPr>
+          <p:cNvPr id="5" name="內容版面配置區 4">
+            <a:extLst>
+              <a:ext uri="{FF2B5EF4-FFF2-40B4-BE49-F238E27FC236}">
+                <a16:creationId xmlns:a16="http://schemas.microsoft.com/office/drawing/2014/main" id="{D8A263A9-D03E-B4BA-91EE-F2200814F1E0}"/>
+              </a:ext>
+            </a:extLst>
+          </p:cNvPr>
+          <p:cNvSpPr>
+            <a:spLocks noGrp="1"/>
+          </p:cNvSpPr>
+          <p:nvPr>
+            <p:ph idx="1"/>
+          </p:nvPr>
+        </p:nvSpPr>
+        <p:spPr>
+          <a:xfrm>
+            <a:off x="0" y="2084853"/>
+            <a:ext cx="12192000" cy="2404863"/>
+          </a:xfrm>
+        </p:spPr>
+        <p:txBody>
+          <a:bodyPr anchor="ctr">
             <a:normAutofit/>
           </a:bodyPr>
           <a:lstStyle/>
           <a:p>
-            <a:r>
-              <a:rPr lang="en-US" altLang="zh-CN" sz="4800" b="1" dirty="0">
+            <a:pPr marL="0" indent="0" algn="ctr">
+              <a:buNone/>
+            </a:pPr>
+            <a:r>
+              <a:rPr lang="zh-TW" altLang="en-US" sz="6400" b="1" dirty="0">
                 <a:solidFill>
-                  <a:srgbClr val="002060"/>
+                  <a:srgbClr val="660033"/>
                 </a:solidFill>
-                <a:latin typeface="Microsoft JhengHei" panose="020B0604030504040204" pitchFamily="34" charset="-120"/>
-                <a:ea typeface="Microsoft JhengHei" panose="020B0604030504040204" pitchFamily="34" charset="-120"/>
+                <a:latin typeface="Microsoft JhengHei" pitchFamily="34" charset="-120"/>
+                <a:ea typeface="Microsoft JhengHei" pitchFamily="34" charset="-120"/>
               </a:rPr>
-              <a:t>【</a:t>
-            </a:r>
-            <a:r>
-              <a:rPr lang="zh-CN" altLang="en-US" sz="4800" b="1" dirty="0">
+              <a:t>耶穌差遣我去  那最窮苦之地</a:t>
+            </a:r>
+          </a:p>
+          <a:p>
+            <a:pPr marL="0" indent="0" algn="ctr">
+              <a:buNone/>
+            </a:pPr>
+            <a:r>
+              <a:rPr lang="zh-TW" altLang="en-US" sz="6400" b="1" dirty="0">
                 <a:solidFill>
-                  <a:srgbClr val="002060"/>
+                  <a:srgbClr val="660033"/>
                 </a:solidFill>
-                <a:latin typeface="Microsoft JhengHei" panose="020B0604030504040204" pitchFamily="34" charset="-120"/>
-                <a:ea typeface="Microsoft JhengHei" panose="020B0604030504040204" pitchFamily="34" charset="-120"/>
+                <a:latin typeface="Microsoft JhengHei" pitchFamily="34" charset="-120"/>
+                <a:ea typeface="Microsoft JhengHei" pitchFamily="34" charset="-120"/>
               </a:rPr>
-              <a:t>到遙遠地方</a:t>
-            </a:r>
-            <a:r>
-              <a:rPr lang="en-US" altLang="zh-CN" sz="4800" b="1" dirty="0">
-                <a:solidFill>
-                  <a:srgbClr val="002060"/>
-                </a:solidFill>
-                <a:latin typeface="Microsoft JhengHei" panose="020B0604030504040204" pitchFamily="34" charset="-120"/>
-                <a:ea typeface="Microsoft JhengHei" panose="020B0604030504040204" pitchFamily="34" charset="-120"/>
-              </a:rPr>
-              <a:t>】</a:t>
-            </a:r>
-          </a:p>
-        </p:txBody>
-      </p:sp>
-      <p:sp>
-        <p:nvSpPr>
-          <p:cNvPr id="5" name="Content Placeholder 4"/>
-          <p:cNvSpPr>
-            <a:spLocks noGrp="1"/>
-          </p:cNvSpPr>
-          <p:nvPr>
-            <p:ph idx="1"/>
-          </p:nvPr>
-        </p:nvSpPr>
-        <p:spPr/>
-        <p:txBody>
-          <a:bodyPr>
-            <a:normAutofit/>
-          </a:bodyPr>
-          <a:lstStyle/>
-          <a:p>
-            <a:pPr marL="0" indent="0" algn="ctr">
-              <a:buNone/>
-            </a:pPr>
-            <a:r>
-              <a:rPr lang="zh-TW" altLang="en-US" sz="5400" b="1" dirty="0">
-                <a:solidFill>
-                  <a:srgbClr val="002060"/>
-                </a:solidFill>
-                <a:latin typeface="Microsoft JhengHei" panose="020B0604030504040204" pitchFamily="34" charset="-120"/>
-                <a:ea typeface="Microsoft JhengHei" panose="020B0604030504040204" pitchFamily="34" charset="-120"/>
-              </a:rPr>
-              <a:t>切莫偸閒遊</a:t>
-            </a:r>
-            <a:r>
-              <a:rPr lang="zh-TW" altLang="en-US" sz="5400" b="1" dirty="0">
-                <a:solidFill>
-                  <a:srgbClr val="002060"/>
-                </a:solidFill>
-                <a:latin typeface="Microsoft JhengHei" panose="020B0604030504040204" pitchFamily="34" charset="-120"/>
-                <a:ea typeface="Microsoft JhengHei" panose="020B0604030504040204" pitchFamily="34" charset="-120"/>
-              </a:rPr>
-              <a:t>蕩  寶</a:t>
-            </a:r>
-            <a:r>
-              <a:rPr lang="zh-TW" altLang="en-US" sz="5400" b="1" dirty="0">
-                <a:solidFill>
-                  <a:srgbClr val="002060"/>
-                </a:solidFill>
-                <a:latin typeface="Microsoft JhengHei" panose="020B0604030504040204" pitchFamily="34" charset="-120"/>
-                <a:ea typeface="Microsoft JhengHei" panose="020B0604030504040204" pitchFamily="34" charset="-120"/>
-              </a:rPr>
-              <a:t>貴光陰拋棄</a:t>
-            </a:r>
-          </a:p>
-          <a:p>
-            <a:pPr marL="0" indent="0" algn="ctr">
-              <a:buNone/>
-            </a:pPr>
-            <a:r>
-              <a:rPr lang="zh-TW" altLang="en-US" sz="5400" b="1" dirty="0">
-                <a:solidFill>
-                  <a:srgbClr val="002060"/>
-                </a:solidFill>
-                <a:latin typeface="Microsoft JhengHei" panose="020B0604030504040204" pitchFamily="34" charset="-120"/>
-                <a:ea typeface="Microsoft JhengHei" panose="020B0604030504040204" pitchFamily="34" charset="-120"/>
-              </a:rPr>
-              <a:t>留戀於世俗無謂耍</a:t>
-            </a:r>
-            <a:r>
-              <a:rPr lang="zh-TW" altLang="en-US" sz="5400" b="1" dirty="0">
-                <a:solidFill>
-                  <a:srgbClr val="002060"/>
-                </a:solidFill>
-                <a:latin typeface="Microsoft JhengHei" panose="020B0604030504040204" pitchFamily="34" charset="-120"/>
-                <a:ea typeface="Microsoft JhengHei" panose="020B0604030504040204" pitchFamily="34" charset="-120"/>
-              </a:rPr>
-              <a:t>戲</a:t>
-            </a:r>
-            <a:endParaRPr lang="en-US" altLang="zh-TW" sz="5400" b="1" dirty="0">
-              <a:solidFill>
-                <a:srgbClr val="002060"/>
-              </a:solidFill>
-              <a:latin typeface="Microsoft JhengHei" panose="020B0604030504040204" pitchFamily="34" charset="-120"/>
-              <a:ea typeface="Microsoft JhengHei" panose="020B0604030504040204" pitchFamily="34" charset="-120"/>
-            </a:endParaRPr>
-          </a:p>
-          <a:p>
-            <a:pPr marL="0" indent="0" algn="ctr">
-              <a:buNone/>
-            </a:pPr>
-            <a:r>
-              <a:rPr lang="zh-TW" altLang="en-US" sz="5400" b="1" dirty="0">
-                <a:solidFill>
-                  <a:srgbClr val="002060"/>
-                </a:solidFill>
-                <a:latin typeface="Microsoft JhengHei" panose="020B0604030504040204" pitchFamily="34" charset="-120"/>
-                <a:ea typeface="Microsoft JhengHei" panose="020B0604030504040204" pitchFamily="34" charset="-120"/>
-              </a:rPr>
-              <a:t>勿淫逸勿自</a:t>
-            </a:r>
-            <a:r>
-              <a:rPr lang="zh-TW" altLang="en-US" sz="5400" b="1" dirty="0">
-                <a:solidFill>
-                  <a:srgbClr val="002060"/>
-                </a:solidFill>
-                <a:latin typeface="Microsoft JhengHei" panose="020B0604030504040204" pitchFamily="34" charset="-120"/>
-                <a:ea typeface="Microsoft JhengHei" panose="020B0604030504040204" pitchFamily="34" charset="-120"/>
-              </a:rPr>
-              <a:t>私亟</a:t>
-            </a:r>
-            <a:r>
-              <a:rPr lang="zh-TW" altLang="en-US" sz="5400" b="1" dirty="0">
-                <a:solidFill>
-                  <a:srgbClr val="002060"/>
-                </a:solidFill>
-                <a:latin typeface="Microsoft JhengHei" panose="020B0604030504040204" pitchFamily="34" charset="-120"/>
-                <a:ea typeface="Microsoft JhengHei" panose="020B0604030504040204" pitchFamily="34" charset="-120"/>
-              </a:rPr>
-              <a:t>應覺悟醒起</a:t>
-            </a:r>
-          </a:p>
-          <a:p>
-            <a:pPr marL="0" indent="0" algn="ctr">
-              <a:buNone/>
-            </a:pPr>
-            <a:r>
-              <a:rPr lang="zh-TW" altLang="en-US" sz="5400" b="1" dirty="0">
-                <a:solidFill>
-                  <a:srgbClr val="002060"/>
-                </a:solidFill>
-                <a:latin typeface="Microsoft JhengHei" panose="020B0604030504040204" pitchFamily="34" charset="-120"/>
-                <a:ea typeface="Microsoft JhengHei" panose="020B0604030504040204" pitchFamily="34" charset="-120"/>
-              </a:rPr>
-              <a:t>快趕到那邊遙遠之</a:t>
-            </a:r>
-            <a:r>
-              <a:rPr lang="zh-TW" altLang="en-US" sz="5400" b="1" dirty="0">
-                <a:solidFill>
-                  <a:srgbClr val="002060"/>
-                </a:solidFill>
-                <a:latin typeface="Microsoft JhengHei" panose="020B0604030504040204" pitchFamily="34" charset="-120"/>
-                <a:ea typeface="Microsoft JhengHei" panose="020B0604030504040204" pitchFamily="34" charset="-120"/>
-              </a:rPr>
-              <a:t>地</a:t>
-            </a:r>
-            <a:endParaRPr lang="zh-TW" altLang="en-US" sz="5400" b="1" dirty="0">
-              <a:solidFill>
-                <a:srgbClr val="002060"/>
-              </a:solidFill>
-              <a:latin typeface="Microsoft JhengHei" panose="020B0604030504040204" pitchFamily="34" charset="-120"/>
-              <a:ea typeface="Microsoft JhengHei" panose="020B0604030504040204" pitchFamily="34" charset="-120"/>
-            </a:endParaRPr>
-          </a:p>
-        </p:txBody>
-      </p:sp>
-      <p:sp>
-        <p:nvSpPr>
-          <p:cNvPr id="6" name="Text Box 1"/>
+              <a:t>切莫想怎樣體貼自己</a:t>
+            </a:r>
+          </a:p>
+        </p:txBody>
+      </p:sp>
+      <p:sp>
+        <p:nvSpPr>
+          <p:cNvPr id="3" name="TextBox 2">
+            <a:extLst>
+              <a:ext uri="{FF2B5EF4-FFF2-40B4-BE49-F238E27FC236}">
+                <a16:creationId xmlns:a16="http://schemas.microsoft.com/office/drawing/2014/main" id="{9A90AED9-C763-2CA3-6BB2-6D60228EE4A7}"/>
+              </a:ext>
+            </a:extLst>
+          </p:cNvPr>
           <p:cNvSpPr txBox="1"/>
           <p:nvPr/>
         </p:nvSpPr>
         <p:spPr>
           <a:xfrm>
-            <a:off x="153888" y="1700808"/>
-            <a:ext cx="911424" cy="923330"/>
+            <a:off x="0" y="5061183"/>
+            <a:ext cx="12192000" cy="584775"/>
           </a:xfrm>
           <a:prstGeom prst="rect">
             <a:avLst/>
           </a:prstGeom>
           <a:noFill/>
-          <a:ln w="9525">
-            <a:noFill/>
-            <a:miter lim="800000"/>
-          </a:ln>
         </p:spPr>
         <p:txBody>
-          <a:bodyPr wrap="square">
+          <a:bodyPr wrap="square" rtlCol="0">
             <a:spAutoFit/>
           </a:bodyPr>
           <a:lstStyle/>
           <a:p>
             <a:pPr algn="ctr"/>
             <a:r>
-              <a:rPr lang="en-US" sz="5400" b="1" dirty="0">
+              <a:rPr lang="en-US" sz="3200" b="1" dirty="0">
                 <a:solidFill>
-                  <a:srgbClr val="002060"/>
+                  <a:srgbClr val="660033"/>
                 </a:solidFill>
               </a:rPr>
-              <a:t>3</a:t>
-            </a:r>
-            <a:r>
-              <a:rPr lang="en-US" sz="5400" b="1" dirty="0" smtClean="0">
-                <a:solidFill>
-                  <a:srgbClr val="002060"/>
-                </a:solidFill>
-              </a:rPr>
-              <a:t>.</a:t>
-            </a:r>
-            <a:endParaRPr lang="en-US" sz="5400" b="1" dirty="0">
+              <a:t>( 2 / 4 )</a:t>
+            </a:r>
+            <a:endParaRPr lang="vi-VN" sz="3200" b="1" dirty="0">
               <a:solidFill>
-                <a:srgbClr val="002060"/>
+                <a:srgbClr val="660033"/>
               </a:solidFill>
             </a:endParaRPr>
           </a:p>
@@ -4987,7 +4791,7 @@
     </p:spTree>
     <p:extLst>
       <p:ext uri="{BB962C8B-B14F-4D97-AF65-F5344CB8AC3E}">
-        <p14:creationId xmlns:p14="http://schemas.microsoft.com/office/powerpoint/2010/main" val="2607006750"/>
+        <p14:creationId xmlns:p14="http://schemas.microsoft.com/office/powerpoint/2010/main" val="2374673739"/>
       </p:ext>
     </p:extLst>
   </p:cSld>
@@ -5002,7 +4806,13 @@
   <p:cSld>
     <p:spTree>
       <p:nvGrpSpPr>
-        <p:cNvPr id="1" name=""/>
+        <p:cNvPr id="1" name="">
+          <a:extLst>
+            <a:ext uri="{FF2B5EF4-FFF2-40B4-BE49-F238E27FC236}">
+              <a16:creationId xmlns:a16="http://schemas.microsoft.com/office/drawing/2014/main" id="{141A32DD-E016-75BB-A20E-C4925A469096}"/>
+            </a:ext>
+          </a:extLst>
+        </p:cNvPr>
         <p:cNvGrpSpPr/>
         <p:nvPr/>
       </p:nvGrpSpPr>
@@ -5016,196 +4826,112 @@
       </p:grpSpPr>
       <p:sp>
         <p:nvSpPr>
-          <p:cNvPr id="4" name="Title 3"/>
-          <p:cNvSpPr>
-            <a:spLocks noGrp="1"/>
-          </p:cNvSpPr>
-          <p:nvPr>
-            <p:ph type="title"/>
-          </p:nvPr>
-        </p:nvSpPr>
-        <p:spPr/>
-        <p:txBody>
-          <a:bodyPr>
+          <p:cNvPr id="5" name="內容版面配置區 4">
+            <a:extLst>
+              <a:ext uri="{FF2B5EF4-FFF2-40B4-BE49-F238E27FC236}">
+                <a16:creationId xmlns:a16="http://schemas.microsoft.com/office/drawing/2014/main" id="{5F5B2706-CA2A-B6D5-29C6-3EE5967084B0}"/>
+              </a:ext>
+            </a:extLst>
+          </p:cNvPr>
+          <p:cNvSpPr>
+            <a:spLocks noGrp="1"/>
+          </p:cNvSpPr>
+          <p:nvPr>
+            <p:ph idx="1"/>
+          </p:nvPr>
+        </p:nvSpPr>
+        <p:spPr>
+          <a:xfrm>
+            <a:off x="0" y="2084853"/>
+            <a:ext cx="12192000" cy="2404863"/>
+          </a:xfrm>
+        </p:spPr>
+        <p:txBody>
+          <a:bodyPr anchor="ctr">
             <a:normAutofit/>
           </a:bodyPr>
           <a:lstStyle/>
           <a:p>
-            <a:r>
-              <a:rPr lang="en-US" altLang="zh-CN" sz="4800" b="1" dirty="0">
+            <a:pPr marL="0" indent="0" algn="ctr">
+              <a:buNone/>
+            </a:pPr>
+            <a:r>
+              <a:rPr lang="zh-TW" altLang="en-US" sz="6400" b="1" dirty="0">
                 <a:solidFill>
-                  <a:srgbClr val="002060"/>
+                  <a:srgbClr val="660033"/>
                 </a:solidFill>
-                <a:latin typeface="Microsoft JhengHei" panose="020B0604030504040204" pitchFamily="34" charset="-120"/>
-                <a:ea typeface="Microsoft JhengHei" panose="020B0604030504040204" pitchFamily="34" charset="-120"/>
+                <a:latin typeface="Microsoft JhengHei" pitchFamily="34" charset="-120"/>
+                <a:ea typeface="Microsoft JhengHei" pitchFamily="34" charset="-120"/>
               </a:rPr>
-              <a:t>【</a:t>
-            </a:r>
-            <a:r>
-              <a:rPr lang="zh-CN" altLang="en-US" sz="4800" b="1" dirty="0">
+              <a:t>世上人都以我為迷夢為大愚</a:t>
+            </a:r>
+          </a:p>
+          <a:p>
+            <a:pPr marL="0" indent="0" algn="ctr">
+              <a:buNone/>
+            </a:pPr>
+            <a:r>
+              <a:rPr lang="zh-TW" altLang="en-US" sz="6400" b="1" dirty="0">
                 <a:solidFill>
-                  <a:srgbClr val="002060"/>
+                  <a:srgbClr val="660033"/>
                 </a:solidFill>
-                <a:latin typeface="Microsoft JhengHei" panose="020B0604030504040204" pitchFamily="34" charset="-120"/>
-                <a:ea typeface="Microsoft JhengHei" panose="020B0604030504040204" pitchFamily="34" charset="-120"/>
+                <a:latin typeface="Microsoft JhengHei" pitchFamily="34" charset="-120"/>
+                <a:ea typeface="Microsoft JhengHei" pitchFamily="34" charset="-120"/>
               </a:rPr>
-              <a:t>到遙遠地方</a:t>
-            </a:r>
-            <a:r>
-              <a:rPr lang="en-US" altLang="zh-CN" sz="4800" b="1" dirty="0">
+              <a:t>但願主喜悅萬事足矣</a:t>
+            </a:r>
+          </a:p>
+        </p:txBody>
+      </p:sp>
+      <p:sp>
+        <p:nvSpPr>
+          <p:cNvPr id="3" name="TextBox 2">
+            <a:extLst>
+              <a:ext uri="{FF2B5EF4-FFF2-40B4-BE49-F238E27FC236}">
+                <a16:creationId xmlns:a16="http://schemas.microsoft.com/office/drawing/2014/main" id="{23718492-2981-C38D-67E1-562A279D815E}"/>
+              </a:ext>
+            </a:extLst>
+          </p:cNvPr>
+          <p:cNvSpPr txBox="1"/>
+          <p:nvPr/>
+        </p:nvSpPr>
+        <p:spPr>
+          <a:xfrm>
+            <a:off x="0" y="5061183"/>
+            <a:ext cx="12192000" cy="584775"/>
+          </a:xfrm>
+          <a:prstGeom prst="rect">
+            <a:avLst/>
+          </a:prstGeom>
+          <a:noFill/>
+        </p:spPr>
+        <p:txBody>
+          <a:bodyPr wrap="square" rtlCol="0">
+            <a:spAutoFit/>
+          </a:bodyPr>
+          <a:lstStyle/>
+          <a:p>
+            <a:pPr algn="ctr"/>
+            <a:r>
+              <a:rPr lang="en-US" sz="3200" b="1" dirty="0">
                 <a:solidFill>
-                  <a:srgbClr val="002060"/>
+                  <a:srgbClr val="660033"/>
                 </a:solidFill>
-                <a:latin typeface="Microsoft JhengHei" panose="020B0604030504040204" pitchFamily="34" charset="-120"/>
-                <a:ea typeface="Microsoft JhengHei" panose="020B0604030504040204" pitchFamily="34" charset="-120"/>
               </a:rPr>
-              <a:t>】</a:t>
-            </a:r>
-          </a:p>
-        </p:txBody>
-      </p:sp>
-      <p:sp>
-        <p:nvSpPr>
-          <p:cNvPr id="5" name="Content Placeholder 4"/>
-          <p:cNvSpPr>
-            <a:spLocks noGrp="1"/>
-          </p:cNvSpPr>
-          <p:nvPr>
-            <p:ph idx="1"/>
-          </p:nvPr>
-        </p:nvSpPr>
-        <p:spPr/>
-        <p:txBody>
-          <a:bodyPr>
-            <a:normAutofit/>
-          </a:bodyPr>
-          <a:lstStyle/>
-          <a:p>
-            <a:pPr marL="0" indent="0" algn="ctr">
-              <a:buNone/>
-            </a:pPr>
-            <a:r>
-              <a:rPr lang="zh-TW" altLang="en-US" sz="5400" b="1" dirty="0">
-                <a:solidFill>
-                  <a:srgbClr val="002060"/>
-                </a:solidFill>
-                <a:latin typeface="Microsoft JhengHei" panose="020B0604030504040204" pitchFamily="34" charset="-120"/>
-                <a:ea typeface="Microsoft JhengHei" panose="020B0604030504040204" pitchFamily="34" charset="-120"/>
-              </a:rPr>
-              <a:t>到遠</a:t>
-            </a:r>
-            <a:r>
-              <a:rPr lang="zh-TW" altLang="en-US" sz="5400" b="1" dirty="0">
-                <a:solidFill>
-                  <a:srgbClr val="002060"/>
-                </a:solidFill>
-                <a:latin typeface="Microsoft JhengHei" panose="020B0604030504040204" pitchFamily="34" charset="-120"/>
-                <a:ea typeface="Microsoft JhengHei" panose="020B0604030504040204" pitchFamily="34" charset="-120"/>
-              </a:rPr>
-              <a:t>方  傳</a:t>
-            </a:r>
-            <a:r>
-              <a:rPr lang="zh-TW" altLang="en-US" sz="5400" b="1" dirty="0">
-                <a:solidFill>
-                  <a:srgbClr val="002060"/>
-                </a:solidFill>
-                <a:latin typeface="Microsoft JhengHei" panose="020B0604030504040204" pitchFamily="34" charset="-120"/>
-                <a:ea typeface="Microsoft JhengHei" panose="020B0604030504040204" pitchFamily="34" charset="-120"/>
-              </a:rPr>
-              <a:t>福音</a:t>
-            </a:r>
-          </a:p>
-          <a:p>
-            <a:pPr marL="0" indent="0" algn="ctr">
-              <a:buNone/>
-            </a:pPr>
-            <a:r>
-              <a:rPr lang="zh-TW" altLang="en-US" sz="5400" b="1" dirty="0">
-                <a:solidFill>
-                  <a:srgbClr val="002060"/>
-                </a:solidFill>
-                <a:latin typeface="Microsoft JhengHei" panose="020B0604030504040204" pitchFamily="34" charset="-120"/>
-                <a:ea typeface="Microsoft JhengHei" panose="020B0604030504040204" pitchFamily="34" charset="-120"/>
-              </a:rPr>
-              <a:t>我必</a:t>
-            </a:r>
-            <a:r>
-              <a:rPr lang="zh-TW" altLang="en-US" sz="5400" b="1" dirty="0">
-                <a:solidFill>
-                  <a:srgbClr val="002060"/>
-                </a:solidFill>
-                <a:latin typeface="Microsoft JhengHei" panose="020B0604030504040204" pitchFamily="34" charset="-120"/>
-                <a:ea typeface="Microsoft JhengHei" panose="020B0604030504040204" pitchFamily="34" charset="-120"/>
-              </a:rPr>
-              <a:t>去  我</a:t>
-            </a:r>
-            <a:r>
-              <a:rPr lang="zh-TW" altLang="en-US" sz="5400" b="1" dirty="0">
-                <a:solidFill>
-                  <a:srgbClr val="002060"/>
-                </a:solidFill>
-                <a:latin typeface="Microsoft JhengHei" panose="020B0604030504040204" pitchFamily="34" charset="-120"/>
-                <a:ea typeface="Microsoft JhengHei" panose="020B0604030504040204" pitchFamily="34" charset="-120"/>
-              </a:rPr>
-              <a:t>必去</a:t>
-            </a:r>
-          </a:p>
-          <a:p>
-            <a:pPr marL="0" indent="0" algn="ctr">
-              <a:buNone/>
-            </a:pPr>
-            <a:r>
-              <a:rPr lang="zh-TW" altLang="en-US" sz="5400" b="1" dirty="0">
-                <a:solidFill>
-                  <a:srgbClr val="002060"/>
-                </a:solidFill>
-                <a:latin typeface="Microsoft JhengHei" panose="020B0604030504040204" pitchFamily="34" charset="-120"/>
-                <a:ea typeface="Microsoft JhengHei" panose="020B0604030504040204" pitchFamily="34" charset="-120"/>
-              </a:rPr>
-              <a:t>至世</a:t>
-            </a:r>
-            <a:r>
-              <a:rPr lang="zh-TW" altLang="en-US" sz="5400" b="1" dirty="0">
-                <a:solidFill>
-                  <a:srgbClr val="002060"/>
-                </a:solidFill>
-                <a:latin typeface="Microsoft JhengHei" panose="020B0604030504040204" pitchFamily="34" charset="-120"/>
-                <a:ea typeface="Microsoft JhengHei" panose="020B0604030504040204" pitchFamily="34" charset="-120"/>
-              </a:rPr>
-              <a:t>界  全</a:t>
-            </a:r>
-            <a:r>
-              <a:rPr lang="zh-TW" altLang="en-US" sz="5400" b="1" dirty="0">
-                <a:solidFill>
-                  <a:srgbClr val="002060"/>
-                </a:solidFill>
-                <a:latin typeface="Microsoft JhengHei" panose="020B0604030504040204" pitchFamily="34" charset="-120"/>
-                <a:ea typeface="Microsoft JhengHei" panose="020B0604030504040204" pitchFamily="34" charset="-120"/>
-              </a:rPr>
-              <a:t>世界</a:t>
-            </a:r>
-          </a:p>
-          <a:p>
-            <a:pPr marL="0" indent="0" algn="ctr">
-              <a:buNone/>
-            </a:pPr>
-            <a:r>
-              <a:rPr lang="zh-TW" altLang="en-US" sz="5400" b="1" dirty="0">
-                <a:solidFill>
-                  <a:srgbClr val="002060"/>
-                </a:solidFill>
-                <a:latin typeface="Microsoft JhengHei" panose="020B0604030504040204" pitchFamily="34" charset="-120"/>
-                <a:ea typeface="Microsoft JhengHei" panose="020B0604030504040204" pitchFamily="34" charset="-120"/>
-              </a:rPr>
-              <a:t>普及救恩真理</a:t>
-            </a:r>
+              <a:t>( 2 / 4 )</a:t>
+            </a:r>
+            <a:endParaRPr lang="vi-VN" sz="3200" b="1" dirty="0">
+              <a:solidFill>
+                <a:srgbClr val="660033"/>
+              </a:solidFill>
+            </a:endParaRPr>
           </a:p>
         </p:txBody>
       </p:sp>
     </p:spTree>
     <p:extLst>
       <p:ext uri="{BB962C8B-B14F-4D97-AF65-F5344CB8AC3E}">
-        <p14:creationId xmlns:p14="http://schemas.microsoft.com/office/powerpoint/2010/main" val="4140518814"/>
+        <p14:creationId xmlns:p14="http://schemas.microsoft.com/office/powerpoint/2010/main" val="3718953113"/>
       </p:ext>
     </p:extLst>
   </p:cSld>
@@ -5220,7 +4946,13 @@
   <p:cSld>
     <p:spTree>
       <p:nvGrpSpPr>
-        <p:cNvPr id="1" name=""/>
+        <p:cNvPr id="1" name="">
+          <a:extLst>
+            <a:ext uri="{FF2B5EF4-FFF2-40B4-BE49-F238E27FC236}">
+              <a16:creationId xmlns:a16="http://schemas.microsoft.com/office/drawing/2014/main" id="{B4E15226-8163-A727-B576-D0C472593C54}"/>
+            </a:ext>
+          </a:extLst>
+        </p:cNvPr>
         <p:cNvGrpSpPr/>
         <p:nvPr/>
       </p:nvGrpSpPr>
@@ -5234,261 +4966,67 @@
       </p:grpSpPr>
       <p:sp>
         <p:nvSpPr>
-          <p:cNvPr id="4" name="Title 3"/>
-          <p:cNvSpPr>
-            <a:spLocks noGrp="1"/>
-          </p:cNvSpPr>
-          <p:nvPr>
-            <p:ph type="title"/>
-          </p:nvPr>
-        </p:nvSpPr>
-        <p:spPr/>
-        <p:txBody>
-          <a:bodyPr>
+          <p:cNvPr id="5" name="內容版面配置區 4">
+            <a:extLst>
+              <a:ext uri="{FF2B5EF4-FFF2-40B4-BE49-F238E27FC236}">
+                <a16:creationId xmlns:a16="http://schemas.microsoft.com/office/drawing/2014/main" id="{FB9B704F-5EE8-9062-2BA0-A02EB3B74C79}"/>
+              </a:ext>
+            </a:extLst>
+          </p:cNvPr>
+          <p:cNvSpPr>
+            <a:spLocks noGrp="1"/>
+          </p:cNvSpPr>
+          <p:nvPr>
+            <p:ph idx="1"/>
+          </p:nvPr>
+        </p:nvSpPr>
+        <p:spPr>
+          <a:xfrm>
+            <a:off x="0" y="2084853"/>
+            <a:ext cx="12192000" cy="2404863"/>
+          </a:xfrm>
+        </p:spPr>
+        <p:txBody>
+          <a:bodyPr anchor="ctr">
             <a:normAutofit/>
           </a:bodyPr>
           <a:lstStyle/>
           <a:p>
-            <a:r>
-              <a:rPr lang="en-US" altLang="zh-CN" sz="4800" b="1" dirty="0">
+            <a:pPr marL="0" indent="0" algn="ctr">
+              <a:buNone/>
+            </a:pPr>
+            <a:r>
+              <a:rPr lang="zh-TW" altLang="en-US" sz="6400" b="1" dirty="0">
                 <a:solidFill>
-                  <a:srgbClr val="002060"/>
+                  <a:srgbClr val="660033"/>
                 </a:solidFill>
-                <a:latin typeface="Microsoft JhengHei" panose="020B0604030504040204" pitchFamily="34" charset="-120"/>
-                <a:ea typeface="Microsoft JhengHei" panose="020B0604030504040204" pitchFamily="34" charset="-120"/>
+                <a:latin typeface="Microsoft JhengHei" pitchFamily="34" charset="-120"/>
+                <a:ea typeface="Microsoft JhengHei" pitchFamily="34" charset="-120"/>
               </a:rPr>
-              <a:t>【</a:t>
-            </a:r>
-            <a:r>
-              <a:rPr lang="zh-CN" altLang="en-US" sz="4800" b="1" dirty="0">
+              <a:t>到遠方  傳福音  我必去  我必去</a:t>
+            </a:r>
+          </a:p>
+          <a:p>
+            <a:pPr marL="0" indent="0" algn="ctr">
+              <a:buNone/>
+            </a:pPr>
+            <a:r>
+              <a:rPr lang="zh-TW" altLang="en-US" sz="6400" b="1" dirty="0">
                 <a:solidFill>
-                  <a:srgbClr val="002060"/>
+                  <a:srgbClr val="660033"/>
                 </a:solidFill>
-                <a:latin typeface="Microsoft JhengHei" panose="020B0604030504040204" pitchFamily="34" charset="-120"/>
-                <a:ea typeface="Microsoft JhengHei" panose="020B0604030504040204" pitchFamily="34" charset="-120"/>
+                <a:latin typeface="Microsoft JhengHei" pitchFamily="34" charset="-120"/>
+                <a:ea typeface="Microsoft JhengHei" pitchFamily="34" charset="-120"/>
               </a:rPr>
-              <a:t>到遙遠地方</a:t>
-            </a:r>
-            <a:r>
-              <a:rPr lang="en-US" altLang="zh-CN" sz="4800" b="1" dirty="0">
-                <a:solidFill>
-                  <a:srgbClr val="002060"/>
-                </a:solidFill>
-                <a:latin typeface="Microsoft JhengHei" panose="020B0604030504040204" pitchFamily="34" charset="-120"/>
-                <a:ea typeface="Microsoft JhengHei" panose="020B0604030504040204" pitchFamily="34" charset="-120"/>
-              </a:rPr>
-              <a:t>】</a:t>
-            </a:r>
-          </a:p>
-        </p:txBody>
-      </p:sp>
-      <p:sp>
-        <p:nvSpPr>
-          <p:cNvPr id="5" name="Content Placeholder 4"/>
-          <p:cNvSpPr>
-            <a:spLocks noGrp="1"/>
-          </p:cNvSpPr>
-          <p:nvPr>
-            <p:ph idx="1"/>
-          </p:nvPr>
-        </p:nvSpPr>
-        <p:spPr/>
-        <p:txBody>
-          <a:bodyPr>
-            <a:normAutofit/>
-          </a:bodyPr>
-          <a:lstStyle/>
-          <a:p>
-            <a:pPr marL="0" indent="0" algn="ctr">
-              <a:buNone/>
-            </a:pPr>
-            <a:r>
-              <a:rPr lang="zh-TW" altLang="en-US" sz="5400" b="1" dirty="0">
-                <a:solidFill>
-                  <a:srgbClr val="002060"/>
-                </a:solidFill>
-                <a:latin typeface="Microsoft JhengHei" panose="020B0604030504040204" pitchFamily="34" charset="-120"/>
-                <a:ea typeface="Microsoft JhengHei" panose="020B0604030504040204" pitchFamily="34" charset="-120"/>
-              </a:rPr>
-              <a:t>亡羊流離失</a:t>
-            </a:r>
-            <a:r>
-              <a:rPr lang="zh-TW" altLang="en-US" sz="5400" b="1" dirty="0">
-                <a:solidFill>
-                  <a:srgbClr val="002060"/>
-                </a:solidFill>
-                <a:latin typeface="Microsoft JhengHei" panose="020B0604030504040204" pitchFamily="34" charset="-120"/>
-                <a:ea typeface="Microsoft JhengHei" panose="020B0604030504040204" pitchFamily="34" charset="-120"/>
-              </a:rPr>
-              <a:t>所  牧</a:t>
-            </a:r>
-            <a:r>
-              <a:rPr lang="zh-TW" altLang="en-US" sz="5400" b="1" dirty="0">
-                <a:solidFill>
-                  <a:srgbClr val="002060"/>
-                </a:solidFill>
-                <a:latin typeface="Microsoft JhengHei" panose="020B0604030504040204" pitchFamily="34" charset="-120"/>
-                <a:ea typeface="Microsoft JhengHei" panose="020B0604030504040204" pitchFamily="34" charset="-120"/>
-              </a:rPr>
-              <a:t>人慈心垂憐</a:t>
-            </a:r>
-          </a:p>
-          <a:p>
-            <a:pPr marL="0" indent="0" algn="ctr">
-              <a:buNone/>
-            </a:pPr>
-            <a:r>
-              <a:rPr lang="zh-TW" altLang="en-US" sz="5400" b="1" dirty="0">
-                <a:solidFill>
-                  <a:srgbClr val="002060"/>
-                </a:solidFill>
-                <a:latin typeface="Microsoft JhengHei" panose="020B0604030504040204" pitchFamily="34" charset="-120"/>
-                <a:ea typeface="Microsoft JhengHei" panose="020B0604030504040204" pitchFamily="34" charset="-120"/>
-              </a:rPr>
-              <a:t>此嘉音應傳諸彼耳</a:t>
-            </a:r>
-            <a:r>
-              <a:rPr lang="zh-TW" altLang="en-US" sz="5400" b="1" dirty="0">
-                <a:solidFill>
-                  <a:srgbClr val="002060"/>
-                </a:solidFill>
-                <a:latin typeface="Microsoft JhengHei" panose="020B0604030504040204" pitchFamily="34" charset="-120"/>
-                <a:ea typeface="Microsoft JhengHei" panose="020B0604030504040204" pitchFamily="34" charset="-120"/>
-              </a:rPr>
-              <a:t>邊</a:t>
-            </a:r>
-            <a:endParaRPr lang="en-US" altLang="zh-TW" sz="5400" b="1" dirty="0">
-              <a:solidFill>
-                <a:srgbClr val="002060"/>
-              </a:solidFill>
-              <a:latin typeface="Microsoft JhengHei" panose="020B0604030504040204" pitchFamily="34" charset="-120"/>
-              <a:ea typeface="Microsoft JhengHei" panose="020B0604030504040204" pitchFamily="34" charset="-120"/>
-            </a:endParaRPr>
-          </a:p>
-          <a:p>
-            <a:pPr marL="0" indent="0" algn="ctr">
-              <a:buNone/>
-            </a:pPr>
-            <a:r>
-              <a:rPr lang="zh-TW" altLang="en-US" sz="5400" b="1" dirty="0">
-                <a:solidFill>
-                  <a:srgbClr val="002060"/>
-                </a:solidFill>
-                <a:latin typeface="Microsoft JhengHei" panose="020B0604030504040204" pitchFamily="34" charset="-120"/>
-                <a:ea typeface="Microsoft JhengHei" panose="020B0604030504040204" pitchFamily="34" charset="-120"/>
-              </a:rPr>
-              <a:t>主特遣我前</a:t>
-            </a:r>
-            <a:r>
-              <a:rPr lang="zh-TW" altLang="en-US" sz="5400" b="1" dirty="0">
-                <a:solidFill>
-                  <a:srgbClr val="002060"/>
-                </a:solidFill>
-                <a:latin typeface="Microsoft JhengHei" panose="020B0604030504040204" pitchFamily="34" charset="-120"/>
-                <a:ea typeface="Microsoft JhengHei" panose="020B0604030504040204" pitchFamily="34" charset="-120"/>
-              </a:rPr>
-              <a:t>往將</a:t>
-            </a:r>
-            <a:r>
-              <a:rPr lang="zh-TW" altLang="en-US" sz="5400" b="1" dirty="0">
-                <a:solidFill>
-                  <a:srgbClr val="002060"/>
-                </a:solidFill>
-                <a:latin typeface="Microsoft JhengHei" panose="020B0604030504040204" pitchFamily="34" charset="-120"/>
-                <a:ea typeface="Microsoft JhengHei" panose="020B0604030504040204" pitchFamily="34" charset="-120"/>
-              </a:rPr>
-              <a:t>他們齊結聯</a:t>
-            </a:r>
-          </a:p>
-          <a:p>
-            <a:pPr marL="0" indent="0" algn="ctr">
-              <a:buNone/>
-            </a:pPr>
-            <a:r>
-              <a:rPr lang="zh-TW" altLang="en-US" sz="5400" b="1" dirty="0">
-                <a:solidFill>
-                  <a:srgbClr val="002060"/>
-                </a:solidFill>
-                <a:latin typeface="Microsoft JhengHei" panose="020B0604030504040204" pitchFamily="34" charset="-120"/>
-                <a:ea typeface="Microsoft JhengHei" panose="020B0604030504040204" pitchFamily="34" charset="-120"/>
-              </a:rPr>
-              <a:t>歡迎他們歸回主羊</a:t>
-            </a:r>
-            <a:r>
-              <a:rPr lang="zh-TW" altLang="en-US" sz="5400" b="1" dirty="0">
-                <a:solidFill>
-                  <a:srgbClr val="002060"/>
-                </a:solidFill>
-                <a:latin typeface="Microsoft JhengHei" panose="020B0604030504040204" pitchFamily="34" charset="-120"/>
-                <a:ea typeface="Microsoft JhengHei" panose="020B0604030504040204" pitchFamily="34" charset="-120"/>
-              </a:rPr>
-              <a:t>圈</a:t>
-            </a:r>
-            <a:endParaRPr lang="zh-TW" altLang="en-US" sz="5400" b="1" dirty="0">
-              <a:solidFill>
-                <a:srgbClr val="002060"/>
-              </a:solidFill>
-              <a:latin typeface="Microsoft JhengHei" panose="020B0604030504040204" pitchFamily="34" charset="-120"/>
-              <a:ea typeface="Microsoft JhengHei" panose="020B0604030504040204" pitchFamily="34" charset="-120"/>
-            </a:endParaRPr>
-          </a:p>
-        </p:txBody>
-      </p:sp>
-      <p:sp>
-        <p:nvSpPr>
-          <p:cNvPr id="6" name="Text Box 1"/>
-          <p:cNvSpPr txBox="1"/>
-          <p:nvPr/>
-        </p:nvSpPr>
-        <p:spPr>
-          <a:xfrm>
-            <a:off x="153888" y="1700808"/>
-            <a:ext cx="911424" cy="923330"/>
-          </a:xfrm>
-          <a:prstGeom prst="rect">
-            <a:avLst/>
-          </a:prstGeom>
-          <a:noFill/>
-          <a:ln w="9525">
-            <a:noFill/>
-            <a:miter lim="800000"/>
-          </a:ln>
-        </p:spPr>
-        <p:txBody>
-          <a:bodyPr wrap="square">
-            <a:spAutoFit/>
-          </a:bodyPr>
-          <a:lstStyle/>
-          <a:p>
-            <a:pPr algn="ctr"/>
-            <a:r>
-              <a:rPr lang="en-US" sz="5400" b="1" dirty="0">
-                <a:solidFill>
-                  <a:srgbClr val="002060"/>
-                </a:solidFill>
-              </a:rPr>
-              <a:t>4</a:t>
-            </a:r>
-            <a:r>
-              <a:rPr lang="en-US" sz="5400" b="1" dirty="0" smtClean="0">
-                <a:solidFill>
-                  <a:srgbClr val="002060"/>
-                </a:solidFill>
-              </a:rPr>
-              <a:t>.</a:t>
-            </a:r>
-            <a:endParaRPr lang="en-US" sz="5400" b="1" dirty="0">
-              <a:solidFill>
-                <a:srgbClr val="002060"/>
-              </a:solidFill>
-            </a:endParaRPr>
+              <a:t>至世界  全世界  普及救恩真理</a:t>
+            </a:r>
           </a:p>
         </p:txBody>
       </p:sp>
     </p:spTree>
     <p:extLst>
       <p:ext uri="{BB962C8B-B14F-4D97-AF65-F5344CB8AC3E}">
-        <p14:creationId xmlns:p14="http://schemas.microsoft.com/office/powerpoint/2010/main" val="1502998576"/>
+        <p14:creationId xmlns:p14="http://schemas.microsoft.com/office/powerpoint/2010/main" val="1302187617"/>
       </p:ext>
     </p:extLst>
   </p:cSld>
@@ -5503,7 +5041,13 @@
   <p:cSld>
     <p:spTree>
       <p:nvGrpSpPr>
-        <p:cNvPr id="1" name=""/>
+        <p:cNvPr id="1" name="">
+          <a:extLst>
+            <a:ext uri="{FF2B5EF4-FFF2-40B4-BE49-F238E27FC236}">
+              <a16:creationId xmlns:a16="http://schemas.microsoft.com/office/drawing/2014/main" id="{09008B31-F1F7-FFCF-A367-AD9D1A625ABD}"/>
+            </a:ext>
+          </a:extLst>
+        </p:cNvPr>
         <p:cNvGrpSpPr/>
         <p:nvPr/>
       </p:nvGrpSpPr>
@@ -5517,196 +5061,252 @@
       </p:grpSpPr>
       <p:sp>
         <p:nvSpPr>
-          <p:cNvPr id="4" name="Title 3"/>
-          <p:cNvSpPr>
-            <a:spLocks noGrp="1"/>
-          </p:cNvSpPr>
-          <p:nvPr>
-            <p:ph type="title"/>
-          </p:nvPr>
-        </p:nvSpPr>
-        <p:spPr/>
-        <p:txBody>
-          <a:bodyPr>
+          <p:cNvPr id="5" name="內容版面配置區 4">
+            <a:extLst>
+              <a:ext uri="{FF2B5EF4-FFF2-40B4-BE49-F238E27FC236}">
+                <a16:creationId xmlns:a16="http://schemas.microsoft.com/office/drawing/2014/main" id="{F9FF4353-5FB3-311C-1AB3-22D42760AAA8}"/>
+              </a:ext>
+            </a:extLst>
+          </p:cNvPr>
+          <p:cNvSpPr>
+            <a:spLocks noGrp="1"/>
+          </p:cNvSpPr>
+          <p:nvPr>
+            <p:ph idx="1"/>
+          </p:nvPr>
+        </p:nvSpPr>
+        <p:spPr>
+          <a:xfrm>
+            <a:off x="0" y="2084853"/>
+            <a:ext cx="12192000" cy="2404863"/>
+          </a:xfrm>
+        </p:spPr>
+        <p:txBody>
+          <a:bodyPr anchor="ctr">
             <a:normAutofit/>
           </a:bodyPr>
           <a:lstStyle/>
           <a:p>
-            <a:r>
-              <a:rPr lang="en-US" altLang="zh-CN" sz="4800" b="1" dirty="0">
+            <a:pPr marL="0" indent="0" algn="ctr">
+              <a:buNone/>
+            </a:pPr>
+            <a:r>
+              <a:rPr lang="zh-TW" altLang="en-US" sz="6400" b="1" dirty="0">
                 <a:solidFill>
-                  <a:srgbClr val="002060"/>
+                  <a:srgbClr val="660033"/>
                 </a:solidFill>
-                <a:latin typeface="Microsoft JhengHei" panose="020B0604030504040204" pitchFamily="34" charset="-120"/>
-                <a:ea typeface="Microsoft JhengHei" panose="020B0604030504040204" pitchFamily="34" charset="-120"/>
+                <a:latin typeface="Microsoft JhengHei" pitchFamily="34" charset="-120"/>
+                <a:ea typeface="Microsoft JhengHei" pitchFamily="34" charset="-120"/>
               </a:rPr>
-              <a:t>【</a:t>
-            </a:r>
-            <a:r>
-              <a:rPr lang="zh-CN" altLang="en-US" sz="4800" b="1" dirty="0">
+              <a:t>切莫偸閒遊蕩  寶貴光陰拋棄</a:t>
+            </a:r>
+          </a:p>
+          <a:p>
+            <a:pPr marL="0" indent="0" algn="ctr">
+              <a:buNone/>
+            </a:pPr>
+            <a:r>
+              <a:rPr lang="zh-TW" altLang="en-US" sz="6400" b="1" dirty="0">
                 <a:solidFill>
-                  <a:srgbClr val="002060"/>
+                  <a:srgbClr val="660033"/>
                 </a:solidFill>
-                <a:latin typeface="Microsoft JhengHei" panose="020B0604030504040204" pitchFamily="34" charset="-120"/>
-                <a:ea typeface="Microsoft JhengHei" panose="020B0604030504040204" pitchFamily="34" charset="-120"/>
+                <a:latin typeface="Microsoft JhengHei" pitchFamily="34" charset="-120"/>
+                <a:ea typeface="Microsoft JhengHei" pitchFamily="34" charset="-120"/>
               </a:rPr>
-              <a:t>到遙遠地方</a:t>
-            </a:r>
-            <a:r>
-              <a:rPr lang="en-US" altLang="zh-CN" sz="4800" b="1" dirty="0">
+              <a:t>留戀於世俗無謂耍戲</a:t>
+            </a:r>
+          </a:p>
+        </p:txBody>
+      </p:sp>
+      <p:sp>
+        <p:nvSpPr>
+          <p:cNvPr id="3" name="TextBox 2">
+            <a:extLst>
+              <a:ext uri="{FF2B5EF4-FFF2-40B4-BE49-F238E27FC236}">
+                <a16:creationId xmlns:a16="http://schemas.microsoft.com/office/drawing/2014/main" id="{F5FAFB82-BE39-5461-F990-722CF057E5B9}"/>
+              </a:ext>
+            </a:extLst>
+          </p:cNvPr>
+          <p:cNvSpPr txBox="1"/>
+          <p:nvPr/>
+        </p:nvSpPr>
+        <p:spPr>
+          <a:xfrm>
+            <a:off x="0" y="5061183"/>
+            <a:ext cx="12192000" cy="584775"/>
+          </a:xfrm>
+          <a:prstGeom prst="rect">
+            <a:avLst/>
+          </a:prstGeom>
+          <a:noFill/>
+        </p:spPr>
+        <p:txBody>
+          <a:bodyPr wrap="square" rtlCol="0">
+            <a:spAutoFit/>
+          </a:bodyPr>
+          <a:lstStyle/>
+          <a:p>
+            <a:pPr algn="ctr"/>
+            <a:r>
+              <a:rPr lang="en-US" sz="3200" b="1" dirty="0">
                 <a:solidFill>
-                  <a:srgbClr val="002060"/>
+                  <a:srgbClr val="660033"/>
                 </a:solidFill>
-                <a:latin typeface="Microsoft JhengHei" panose="020B0604030504040204" pitchFamily="34" charset="-120"/>
-                <a:ea typeface="Microsoft JhengHei" panose="020B0604030504040204" pitchFamily="34" charset="-120"/>
               </a:rPr>
-              <a:t>】</a:t>
-            </a:r>
-          </a:p>
-        </p:txBody>
-      </p:sp>
-      <p:sp>
-        <p:nvSpPr>
-          <p:cNvPr id="5" name="Content Placeholder 4"/>
-          <p:cNvSpPr>
-            <a:spLocks noGrp="1"/>
-          </p:cNvSpPr>
-          <p:nvPr>
-            <p:ph idx="1"/>
-          </p:nvPr>
-        </p:nvSpPr>
-        <p:spPr/>
-        <p:txBody>
-          <a:bodyPr>
-            <a:normAutofit/>
-          </a:bodyPr>
-          <a:lstStyle/>
-          <a:p>
-            <a:pPr marL="0" indent="0" algn="ctr">
-              <a:buNone/>
-            </a:pPr>
-            <a:r>
-              <a:rPr lang="zh-TW" altLang="en-US" sz="5400" b="1" dirty="0">
-                <a:solidFill>
-                  <a:srgbClr val="002060"/>
-                </a:solidFill>
-                <a:latin typeface="Microsoft JhengHei" panose="020B0604030504040204" pitchFamily="34" charset="-120"/>
-                <a:ea typeface="Microsoft JhengHei" panose="020B0604030504040204" pitchFamily="34" charset="-120"/>
-              </a:rPr>
-              <a:t>到遠</a:t>
-            </a:r>
-            <a:r>
-              <a:rPr lang="zh-TW" altLang="en-US" sz="5400" b="1" dirty="0">
-                <a:solidFill>
-                  <a:srgbClr val="002060"/>
-                </a:solidFill>
-                <a:latin typeface="Microsoft JhengHei" panose="020B0604030504040204" pitchFamily="34" charset="-120"/>
-                <a:ea typeface="Microsoft JhengHei" panose="020B0604030504040204" pitchFamily="34" charset="-120"/>
-              </a:rPr>
-              <a:t>方  傳</a:t>
-            </a:r>
-            <a:r>
-              <a:rPr lang="zh-TW" altLang="en-US" sz="5400" b="1" dirty="0">
-                <a:solidFill>
-                  <a:srgbClr val="002060"/>
-                </a:solidFill>
-                <a:latin typeface="Microsoft JhengHei" panose="020B0604030504040204" pitchFamily="34" charset="-120"/>
-                <a:ea typeface="Microsoft JhengHei" panose="020B0604030504040204" pitchFamily="34" charset="-120"/>
-              </a:rPr>
-              <a:t>福音</a:t>
-            </a:r>
-          </a:p>
-          <a:p>
-            <a:pPr marL="0" indent="0" algn="ctr">
-              <a:buNone/>
-            </a:pPr>
-            <a:r>
-              <a:rPr lang="zh-TW" altLang="en-US" sz="5400" b="1" dirty="0">
-                <a:solidFill>
-                  <a:srgbClr val="002060"/>
-                </a:solidFill>
-                <a:latin typeface="Microsoft JhengHei" panose="020B0604030504040204" pitchFamily="34" charset="-120"/>
-                <a:ea typeface="Microsoft JhengHei" panose="020B0604030504040204" pitchFamily="34" charset="-120"/>
-              </a:rPr>
-              <a:t>我必</a:t>
-            </a:r>
-            <a:r>
-              <a:rPr lang="zh-TW" altLang="en-US" sz="5400" b="1" dirty="0">
-                <a:solidFill>
-                  <a:srgbClr val="002060"/>
-                </a:solidFill>
-                <a:latin typeface="Microsoft JhengHei" panose="020B0604030504040204" pitchFamily="34" charset="-120"/>
-                <a:ea typeface="Microsoft JhengHei" panose="020B0604030504040204" pitchFamily="34" charset="-120"/>
-              </a:rPr>
-              <a:t>去  我</a:t>
-            </a:r>
-            <a:r>
-              <a:rPr lang="zh-TW" altLang="en-US" sz="5400" b="1" dirty="0">
-                <a:solidFill>
-                  <a:srgbClr val="002060"/>
-                </a:solidFill>
-                <a:latin typeface="Microsoft JhengHei" panose="020B0604030504040204" pitchFamily="34" charset="-120"/>
-                <a:ea typeface="Microsoft JhengHei" panose="020B0604030504040204" pitchFamily="34" charset="-120"/>
-              </a:rPr>
-              <a:t>必去</a:t>
-            </a:r>
-          </a:p>
-          <a:p>
-            <a:pPr marL="0" indent="0" algn="ctr">
-              <a:buNone/>
-            </a:pPr>
-            <a:r>
-              <a:rPr lang="zh-TW" altLang="en-US" sz="5400" b="1" dirty="0">
-                <a:solidFill>
-                  <a:srgbClr val="002060"/>
-                </a:solidFill>
-                <a:latin typeface="Microsoft JhengHei" panose="020B0604030504040204" pitchFamily="34" charset="-120"/>
-                <a:ea typeface="Microsoft JhengHei" panose="020B0604030504040204" pitchFamily="34" charset="-120"/>
-              </a:rPr>
-              <a:t>至世</a:t>
-            </a:r>
-            <a:r>
-              <a:rPr lang="zh-TW" altLang="en-US" sz="5400" b="1" dirty="0">
-                <a:solidFill>
-                  <a:srgbClr val="002060"/>
-                </a:solidFill>
-                <a:latin typeface="Microsoft JhengHei" panose="020B0604030504040204" pitchFamily="34" charset="-120"/>
-                <a:ea typeface="Microsoft JhengHei" panose="020B0604030504040204" pitchFamily="34" charset="-120"/>
-              </a:rPr>
-              <a:t>界  全</a:t>
-            </a:r>
-            <a:r>
-              <a:rPr lang="zh-TW" altLang="en-US" sz="5400" b="1" dirty="0">
-                <a:solidFill>
-                  <a:srgbClr val="002060"/>
-                </a:solidFill>
-                <a:latin typeface="Microsoft JhengHei" panose="020B0604030504040204" pitchFamily="34" charset="-120"/>
-                <a:ea typeface="Microsoft JhengHei" panose="020B0604030504040204" pitchFamily="34" charset="-120"/>
-              </a:rPr>
-              <a:t>世界</a:t>
-            </a:r>
-          </a:p>
-          <a:p>
-            <a:pPr marL="0" indent="0" algn="ctr">
-              <a:buNone/>
-            </a:pPr>
-            <a:r>
-              <a:rPr lang="zh-TW" altLang="en-US" sz="5400" b="1" dirty="0">
-                <a:solidFill>
-                  <a:srgbClr val="002060"/>
-                </a:solidFill>
-                <a:latin typeface="Microsoft JhengHei" panose="020B0604030504040204" pitchFamily="34" charset="-120"/>
-                <a:ea typeface="Microsoft JhengHei" panose="020B0604030504040204" pitchFamily="34" charset="-120"/>
-              </a:rPr>
-              <a:t>普及救恩真理</a:t>
-            </a:r>
+              <a:t>( 3 / 4 )</a:t>
+            </a:r>
+            <a:endParaRPr lang="vi-VN" sz="3200" b="1" dirty="0">
+              <a:solidFill>
+                <a:srgbClr val="660033"/>
+              </a:solidFill>
+            </a:endParaRPr>
           </a:p>
         </p:txBody>
       </p:sp>
     </p:spTree>
     <p:extLst>
       <p:ext uri="{BB962C8B-B14F-4D97-AF65-F5344CB8AC3E}">
-        <p14:creationId xmlns:p14="http://schemas.microsoft.com/office/powerpoint/2010/main" val="1021234853"/>
+        <p14:creationId xmlns:p14="http://schemas.microsoft.com/office/powerpoint/2010/main" val="1396389785"/>
+      </p:ext>
+    </p:extLst>
+  </p:cSld>
+  <p:clrMapOvr>
+    <a:masterClrMapping/>
+  </p:clrMapOvr>
+</p:sld>
+</file>
+
+<file path=ppt/slides/slide9.xml><?xml version="1.0" encoding="utf-8"?>
+<p:sld xmlns:a="http://schemas.openxmlformats.org/drawingml/2006/main" xmlns:r="http://schemas.openxmlformats.org/officeDocument/2006/relationships" xmlns:p="http://schemas.openxmlformats.org/presentationml/2006/main">
+  <p:cSld>
+    <p:spTree>
+      <p:nvGrpSpPr>
+        <p:cNvPr id="1" name="">
+          <a:extLst>
+            <a:ext uri="{FF2B5EF4-FFF2-40B4-BE49-F238E27FC236}">
+              <a16:creationId xmlns:a16="http://schemas.microsoft.com/office/drawing/2014/main" id="{B478959F-53AF-F1CE-853D-D373EB8CFF03}"/>
+            </a:ext>
+          </a:extLst>
+        </p:cNvPr>
+        <p:cNvGrpSpPr/>
+        <p:nvPr/>
+      </p:nvGrpSpPr>
+      <p:grpSpPr>
+        <a:xfrm>
+          <a:off x="0" y="0"/>
+          <a:ext cx="0" cy="0"/>
+          <a:chOff x="0" y="0"/>
+          <a:chExt cx="0" cy="0"/>
+        </a:xfrm>
+      </p:grpSpPr>
+      <p:sp>
+        <p:nvSpPr>
+          <p:cNvPr id="5" name="內容版面配置區 4">
+            <a:extLst>
+              <a:ext uri="{FF2B5EF4-FFF2-40B4-BE49-F238E27FC236}">
+                <a16:creationId xmlns:a16="http://schemas.microsoft.com/office/drawing/2014/main" id="{6361DB77-F5C2-6537-541A-ED07C0A7FAB9}"/>
+              </a:ext>
+            </a:extLst>
+          </p:cNvPr>
+          <p:cNvSpPr>
+            <a:spLocks noGrp="1"/>
+          </p:cNvSpPr>
+          <p:nvPr>
+            <p:ph idx="1"/>
+          </p:nvPr>
+        </p:nvSpPr>
+        <p:spPr>
+          <a:xfrm>
+            <a:off x="0" y="2084853"/>
+            <a:ext cx="12192000" cy="2404863"/>
+          </a:xfrm>
+        </p:spPr>
+        <p:txBody>
+          <a:bodyPr anchor="ctr">
+            <a:normAutofit/>
+          </a:bodyPr>
+          <a:lstStyle/>
+          <a:p>
+            <a:pPr marL="0" indent="0" algn="ctr">
+              <a:buNone/>
+            </a:pPr>
+            <a:r>
+              <a:rPr lang="zh-TW" altLang="en-US" sz="6400" b="1" dirty="0">
+                <a:solidFill>
+                  <a:srgbClr val="660033"/>
+                </a:solidFill>
+                <a:latin typeface="Microsoft JhengHei" pitchFamily="34" charset="-120"/>
+                <a:ea typeface="Microsoft JhengHei" pitchFamily="34" charset="-120"/>
+              </a:rPr>
+              <a:t>勿淫逸勿自私亟應覺悟醒起</a:t>
+            </a:r>
+          </a:p>
+          <a:p>
+            <a:pPr marL="0" indent="0" algn="ctr">
+              <a:buNone/>
+            </a:pPr>
+            <a:r>
+              <a:rPr lang="zh-TW" altLang="en-US" sz="6400" b="1" dirty="0">
+                <a:solidFill>
+                  <a:srgbClr val="660033"/>
+                </a:solidFill>
+                <a:latin typeface="Microsoft JhengHei" pitchFamily="34" charset="-120"/>
+                <a:ea typeface="Microsoft JhengHei" pitchFamily="34" charset="-120"/>
+              </a:rPr>
+              <a:t>快趕到那邊遙遠之地</a:t>
+            </a:r>
+          </a:p>
+        </p:txBody>
+      </p:sp>
+      <p:sp>
+        <p:nvSpPr>
+          <p:cNvPr id="3" name="TextBox 2">
+            <a:extLst>
+              <a:ext uri="{FF2B5EF4-FFF2-40B4-BE49-F238E27FC236}">
+                <a16:creationId xmlns:a16="http://schemas.microsoft.com/office/drawing/2014/main" id="{DEA0907B-2018-9527-4559-99935F40F508}"/>
+              </a:ext>
+            </a:extLst>
+          </p:cNvPr>
+          <p:cNvSpPr txBox="1"/>
+          <p:nvPr/>
+        </p:nvSpPr>
+        <p:spPr>
+          <a:xfrm>
+            <a:off x="0" y="5061183"/>
+            <a:ext cx="12192000" cy="584775"/>
+          </a:xfrm>
+          <a:prstGeom prst="rect">
+            <a:avLst/>
+          </a:prstGeom>
+          <a:noFill/>
+        </p:spPr>
+        <p:txBody>
+          <a:bodyPr wrap="square" rtlCol="0">
+            <a:spAutoFit/>
+          </a:bodyPr>
+          <a:lstStyle/>
+          <a:p>
+            <a:pPr algn="ctr"/>
+            <a:r>
+              <a:rPr lang="en-US" sz="3200" b="1" dirty="0">
+                <a:solidFill>
+                  <a:srgbClr val="660033"/>
+                </a:solidFill>
+              </a:rPr>
+              <a:t>( 3 / 4 )</a:t>
+            </a:r>
+            <a:endParaRPr lang="vi-VN" sz="3200" b="1" dirty="0">
+              <a:solidFill>
+                <a:srgbClr val="660033"/>
+              </a:solidFill>
+            </a:endParaRPr>
+          </a:p>
+        </p:txBody>
+      </p:sp>
+    </p:spTree>
+    <p:extLst>
+      <p:ext uri="{BB962C8B-B14F-4D97-AF65-F5344CB8AC3E}">
+        <p14:creationId xmlns:p14="http://schemas.microsoft.com/office/powerpoint/2010/main" val="485135937"/>
       </p:ext>
     </p:extLst>
   </p:cSld>
